--- a/slides/landing-tall.pptx
+++ b/slides/landing-tall.pptx
@@ -12,6 +12,8 @@
     <p:sldId id="257" r:id="rIdS2"/>
     <p:sldId id="258" r:id="rIdS3"/>
     <p:sldId id="259" r:id="rIdS4"/>
+    <p:sldId id="260" r:id="rIdS5"/>
+    <p:sldId id="261" r:id="rIdS6"/>
   </p:sldIdLst>
   <p:sldSz cx="5715000" cy="9144000"/>
   <p:notesSz cx="6858000" cy="9144000"/>
@@ -2400,7 +2402,7 @@
                 <a:latin typeface="Calibri"/>
                 <a:cs typeface="Calibri"/>
               </a:rPr>
-              <a:t>An open source office suite.</a:t>
+              <a:t>Writer. Slides. Sheets.</a:t>
             </a:r>
             <a:endParaRPr lang="en-US" sz="2300" b="0" i="0" u="none" strike="noStrike" dirty="0">
               <a:solidFill>
@@ -2431,7 +2433,7 @@
                 <a:latin typeface="Calibri"/>
                 <a:cs typeface="Calibri"/>
               </a:rPr>
-              <a:t>Starting with Writer.</a:t>
+              <a:t>An open source office suite.</a:t>
             </a:r>
             <a:endParaRPr lang="en-US" sz="2300" b="0" i="0" u="none" strike="noStrike" dirty="0">
               <a:solidFill>
@@ -2445,63 +2447,14 @@
       </p:sp>
       <p:sp>
         <p:nvSpPr>
-          <p:cNvPr id="5" name="Rectangle 8"/>
+          <p:cNvPr id="5" name="Rounded Rectangle 8"/>
           <p:cNvSpPr/>
           <p:nvPr/>
         </p:nvSpPr>
         <p:spPr>
-          <a:xfrm rot="-600000">
-            <a:off x="2616200" y="5969000"/>
-            <a:ext cx="2184400" cy="2641600"/>
-          </a:xfrm>
-          <a:prstGeom prst="rect">
-            <a:avLst/>
-          </a:prstGeom>
-          <a:solidFill>
-            <a:srgbClr val="92ADFF"/>
-          </a:solidFill>
-          <a:ln>
-            <a:noFill/>
-          </a:ln>
-        </p:spPr>
-        <p:txBody>
-          <a:bodyPr wrap="square" lIns="91440" tIns="45720" rIns="91440" bIns="45720" anchor="ctr" rtlCol="0">
-            <a:noAutofit/>
-          </a:bodyPr>
-          <a:lstStyle/>
-          <a:p>
-            <a:pPr algn="ctr" marL="0" indent="0">
-              <a:lnSpc>
-                <a:spcPct val="100000"/>
-              </a:lnSpc>
-              <a:spcBef>
-                <a:spcPts val="0"/>
-              </a:spcBef>
-              <a:spcAft>
-                <a:spcPts val="0"/>
-              </a:spcAft>
-              <a:buNone/>
-            </a:pPr>
-            <a:endParaRPr lang="en-US" sz="1800" b="0" i="0" u="none" strike="noStrike" dirty="0">
-              <a:solidFill>
-                <a:srgbClr val="FFFFFF"/>
-              </a:solidFill>
-              <a:latin typeface="Calibri"/>
-              <a:cs typeface="Calibri"/>
-            </a:endParaRPr>
-          </a:p>
-        </p:txBody>
-      </p:sp>
-      <p:sp>
-        <p:nvSpPr>
-          <p:cNvPr id="6" name="Rounded Rectangle 9"/>
-          <p:cNvSpPr/>
-          <p:nvPr/>
-        </p:nvSpPr>
-        <p:spPr>
-          <a:xfrm>
-            <a:off x="2971800" y="5892800"/>
-            <a:ext cx="2184400" cy="2641600"/>
+          <a:xfrm>
+            <a:off x="406400" y="6096000"/>
+            <a:ext cx="1549400" cy="1981200"/>
           </a:xfrm>
           <a:prstGeom prst="roundRect">
             <a:avLst/>
@@ -2543,14 +2496,63 @@
       </p:sp>
       <p:sp>
         <p:nvSpPr>
+          <p:cNvPr id="6" name="Rounded Rectangle 9"/>
+          <p:cNvSpPr/>
+          <p:nvPr/>
+        </p:nvSpPr>
+        <p:spPr>
+          <a:xfrm>
+            <a:off x="584200" y="6273800"/>
+            <a:ext cx="533400" cy="533400"/>
+          </a:xfrm>
+          <a:prstGeom prst="roundRect">
+            <a:avLst/>
+          </a:prstGeom>
+          <a:solidFill>
+            <a:srgbClr val="2449DF"/>
+          </a:solidFill>
+          <a:ln>
+            <a:noFill/>
+          </a:ln>
+        </p:spPr>
+        <p:txBody>
+          <a:bodyPr wrap="square" lIns="91440" tIns="45720" rIns="91440" bIns="45720" anchor="ctr" rtlCol="0">
+            <a:noAutofit/>
+          </a:bodyPr>
+          <a:lstStyle/>
+          <a:p>
+            <a:pPr algn="ctr" marL="0" indent="0">
+              <a:lnSpc>
+                <a:spcPct val="100000"/>
+              </a:lnSpc>
+              <a:spcBef>
+                <a:spcPts val="0"/>
+              </a:spcBef>
+              <a:spcAft>
+                <a:spcPts val="0"/>
+              </a:spcAft>
+              <a:buNone/>
+            </a:pPr>
+            <a:endParaRPr lang="en-US" sz="1800" b="0" i="0" u="none" strike="noStrike" dirty="0">
+              <a:solidFill>
+                <a:srgbClr val="FFFFFF"/>
+              </a:solidFill>
+              <a:latin typeface="Calibri"/>
+              <a:cs typeface="Calibri"/>
+            </a:endParaRPr>
+          </a:p>
+        </p:txBody>
+      </p:sp>
+      <p:sp>
+        <p:nvSpPr>
           <p:cNvPr id="7" name="TextBox 10"/>
           <p:cNvSpPr txBox="1"/>
           <p:nvPr/>
         </p:nvSpPr>
         <p:spPr>
           <a:xfrm>
-            <a:off x="3251200" y="6096000"/>
-            <a:ext cx="1803400" cy="3048000"/>
+            <a:off x="698500" y="6299200"/>
+            <a:ext cx="711200" cy="2844800"/>
           </a:xfrm>
           <a:prstGeom prst="rect">
             <a:avLst/>
@@ -2579,65 +2581,16 @@
               <a:buNone/>
             </a:pPr>
             <a:r>
-              <a:rPr lang="en-US" sz="4800" b="1" i="0" u="none" strike="noStrike" dirty="0">
-                <a:solidFill>
-                  <a:srgbClr val="2449DF"/>
+              <a:rPr lang="en-US" sz="2900" b="1" i="0" u="none" strike="noStrike" dirty="0">
+                <a:solidFill>
+                  <a:srgbClr val="FFFFFF"/>
                 </a:solidFill>
                 <a:latin typeface="Calibri"/>
                 <a:cs typeface="Calibri"/>
               </a:rPr>
               <a:t>W</a:t>
             </a:r>
-            <a:endParaRPr lang="en-US" sz="4800" b="1" i="0" u="none" strike="noStrike" dirty="0">
-              <a:solidFill>
-                <a:srgbClr val="2449DF"/>
-              </a:solidFill>
-              <a:latin typeface="Calibri"/>
-              <a:cs typeface="Calibri"/>
-            </a:endParaRPr>
-          </a:p>
-        </p:txBody>
-      </p:sp>
-      <p:sp>
-        <p:nvSpPr>
-          <p:cNvPr id="8" name="Rectangle 11"/>
-          <p:cNvSpPr/>
-          <p:nvPr/>
-        </p:nvSpPr>
-        <p:spPr>
-          <a:xfrm>
-            <a:off x="3276600" y="7200900"/>
-            <a:ext cx="1574800" cy="50800"/>
-          </a:xfrm>
-          <a:prstGeom prst="rect">
-            <a:avLst/>
-          </a:prstGeom>
-          <a:solidFill>
-            <a:srgbClr val="DDE5F5"/>
-          </a:solidFill>
-          <a:ln>
-            <a:noFill/>
-          </a:ln>
-        </p:spPr>
-        <p:txBody>
-          <a:bodyPr wrap="square" lIns="91440" tIns="45720" rIns="91440" bIns="45720" anchor="ctr" rtlCol="0">
-            <a:noAutofit/>
-          </a:bodyPr>
-          <a:lstStyle/>
-          <a:p>
-            <a:pPr algn="ctr" marL="0" indent="0">
-              <a:lnSpc>
-                <a:spcPct val="100000"/>
-              </a:lnSpc>
-              <a:spcBef>
-                <a:spcPts val="0"/>
-              </a:spcBef>
-              <a:spcAft>
-                <a:spcPts val="0"/>
-              </a:spcAft>
-              <a:buNone/>
-            </a:pPr>
-            <a:endParaRPr lang="en-US" sz="1800" b="0" i="0" u="none" strike="noStrike" dirty="0">
+            <a:endParaRPr lang="en-US" sz="2900" b="1" i="0" u="none" strike="noStrike" dirty="0">
               <a:solidFill>
                 <a:srgbClr val="FFFFFF"/>
               </a:solidFill>
@@ -2649,210 +2602,14 @@
       </p:sp>
       <p:sp>
         <p:nvSpPr>
-          <p:cNvPr id="9" name="Rectangle 12"/>
-          <p:cNvSpPr/>
-          <p:nvPr/>
-        </p:nvSpPr>
-        <p:spPr>
-          <a:xfrm>
-            <a:off x="3276600" y="7391400"/>
-            <a:ext cx="1574800" cy="50800"/>
-          </a:xfrm>
-          <a:prstGeom prst="rect">
-            <a:avLst/>
-          </a:prstGeom>
-          <a:solidFill>
-            <a:srgbClr val="DDE5F5"/>
-          </a:solidFill>
-          <a:ln>
-            <a:noFill/>
-          </a:ln>
-        </p:spPr>
-        <p:txBody>
-          <a:bodyPr wrap="square" lIns="91440" tIns="45720" rIns="91440" bIns="45720" anchor="ctr" rtlCol="0">
-            <a:noAutofit/>
-          </a:bodyPr>
-          <a:lstStyle/>
-          <a:p>
-            <a:pPr algn="ctr" marL="0" indent="0">
-              <a:lnSpc>
-                <a:spcPct val="100000"/>
-              </a:lnSpc>
-              <a:spcBef>
-                <a:spcPts val="0"/>
-              </a:spcBef>
-              <a:spcAft>
-                <a:spcPts val="0"/>
-              </a:spcAft>
-              <a:buNone/>
-            </a:pPr>
-            <a:endParaRPr lang="en-US" sz="1800" b="0" i="0" u="none" strike="noStrike" dirty="0">
-              <a:solidFill>
-                <a:srgbClr val="FFFFFF"/>
-              </a:solidFill>
-              <a:latin typeface="Calibri"/>
-              <a:cs typeface="Calibri"/>
-            </a:endParaRPr>
-          </a:p>
-        </p:txBody>
-      </p:sp>
-      <p:sp>
-        <p:nvSpPr>
-          <p:cNvPr id="10" name="Rectangle 13"/>
-          <p:cNvSpPr/>
-          <p:nvPr/>
-        </p:nvSpPr>
-        <p:spPr>
-          <a:xfrm>
-            <a:off x="3276600" y="7581900"/>
-            <a:ext cx="1574800" cy="50800"/>
-          </a:xfrm>
-          <a:prstGeom prst="rect">
-            <a:avLst/>
-          </a:prstGeom>
-          <a:solidFill>
-            <a:srgbClr val="DDE5F5"/>
-          </a:solidFill>
-          <a:ln>
-            <a:noFill/>
-          </a:ln>
-        </p:spPr>
-        <p:txBody>
-          <a:bodyPr wrap="square" lIns="91440" tIns="45720" rIns="91440" bIns="45720" anchor="ctr" rtlCol="0">
-            <a:noAutofit/>
-          </a:bodyPr>
-          <a:lstStyle/>
-          <a:p>
-            <a:pPr algn="ctr" marL="0" indent="0">
-              <a:lnSpc>
-                <a:spcPct val="100000"/>
-              </a:lnSpc>
-              <a:spcBef>
-                <a:spcPts val="0"/>
-              </a:spcBef>
-              <a:spcAft>
-                <a:spcPts val="0"/>
-              </a:spcAft>
-              <a:buNone/>
-            </a:pPr>
-            <a:endParaRPr lang="en-US" sz="1800" b="0" i="0" u="none" strike="noStrike" dirty="0">
-              <a:solidFill>
-                <a:srgbClr val="FFFFFF"/>
-              </a:solidFill>
-              <a:latin typeface="Calibri"/>
-              <a:cs typeface="Calibri"/>
-            </a:endParaRPr>
-          </a:p>
-        </p:txBody>
-      </p:sp>
-      <p:sp>
-        <p:nvSpPr>
-          <p:cNvPr id="11" name="Rectangle 14"/>
-          <p:cNvSpPr/>
-          <p:nvPr/>
-        </p:nvSpPr>
-        <p:spPr>
-          <a:xfrm>
-            <a:off x="3276600" y="7772400"/>
-            <a:ext cx="1574800" cy="50800"/>
-          </a:xfrm>
-          <a:prstGeom prst="rect">
-            <a:avLst/>
-          </a:prstGeom>
-          <a:solidFill>
-            <a:srgbClr val="DDE5F5"/>
-          </a:solidFill>
-          <a:ln>
-            <a:noFill/>
-          </a:ln>
-        </p:spPr>
-        <p:txBody>
-          <a:bodyPr wrap="square" lIns="91440" tIns="45720" rIns="91440" bIns="45720" anchor="ctr" rtlCol="0">
-            <a:noAutofit/>
-          </a:bodyPr>
-          <a:lstStyle/>
-          <a:p>
-            <a:pPr algn="ctr" marL="0" indent="0">
-              <a:lnSpc>
-                <a:spcPct val="100000"/>
-              </a:lnSpc>
-              <a:spcBef>
-                <a:spcPts val="0"/>
-              </a:spcBef>
-              <a:spcAft>
-                <a:spcPts val="0"/>
-              </a:spcAft>
-              <a:buNone/>
-            </a:pPr>
-            <a:endParaRPr lang="en-US" sz="1800" b="0" i="0" u="none" strike="noStrike" dirty="0">
-              <a:solidFill>
-                <a:srgbClr val="FFFFFF"/>
-              </a:solidFill>
-              <a:latin typeface="Calibri"/>
-              <a:cs typeface="Calibri"/>
-            </a:endParaRPr>
-          </a:p>
-        </p:txBody>
-      </p:sp>
-      <p:sp>
-        <p:nvSpPr>
-          <p:cNvPr id="12" name="Rectangle 15"/>
-          <p:cNvSpPr/>
-          <p:nvPr/>
-        </p:nvSpPr>
-        <p:spPr>
-          <a:xfrm>
-            <a:off x="3276600" y="7962900"/>
-            <a:ext cx="1104900" cy="50800"/>
-          </a:xfrm>
-          <a:prstGeom prst="rect">
-            <a:avLst/>
-          </a:prstGeom>
-          <a:solidFill>
-            <a:srgbClr val="DDE5F5"/>
-          </a:solidFill>
-          <a:ln>
-            <a:noFill/>
-          </a:ln>
-        </p:spPr>
-        <p:txBody>
-          <a:bodyPr wrap="square" lIns="91440" tIns="45720" rIns="91440" bIns="45720" anchor="ctr" rtlCol="0">
-            <a:noAutofit/>
-          </a:bodyPr>
-          <a:lstStyle/>
-          <a:p>
-            <a:pPr algn="ctr" marL="0" indent="0">
-              <a:lnSpc>
-                <a:spcPct val="100000"/>
-              </a:lnSpc>
-              <a:spcBef>
-                <a:spcPts val="0"/>
-              </a:spcBef>
-              <a:spcAft>
-                <a:spcPts val="0"/>
-              </a:spcAft>
-              <a:buNone/>
-            </a:pPr>
-            <a:endParaRPr lang="en-US" sz="1800" b="0" i="0" u="none" strike="noStrike" dirty="0">
-              <a:solidFill>
-                <a:srgbClr val="FFFFFF"/>
-              </a:solidFill>
-              <a:latin typeface="Calibri"/>
-              <a:cs typeface="Calibri"/>
-            </a:endParaRPr>
-          </a:p>
-        </p:txBody>
-      </p:sp>
-      <p:sp>
-        <p:nvSpPr>
-          <p:cNvPr id="13" name="TextBox 16"/>
+          <p:cNvPr id="8" name="TextBox 11"/>
           <p:cNvSpPr txBox="1"/>
           <p:nvPr/>
         </p:nvSpPr>
         <p:spPr>
           <a:xfrm>
-            <a:off x="406400" y="7048500"/>
-            <a:ext cx="2286000" cy="2095500"/>
+            <a:off x="584200" y="7023100"/>
+            <a:ext cx="1270000" cy="2120900"/>
           </a:xfrm>
           <a:prstGeom prst="rect">
             <a:avLst/>
@@ -2881,35 +2638,35 @@
               <a:buNone/>
             </a:pPr>
             <a:r>
-              <a:rPr lang="en-US" sz="1400" b="1" i="0" u="none" strike="noStrike" dirty="0">
-                <a:solidFill>
-                  <a:srgbClr val="FFFFFF"/>
+              <a:rPr lang="en-US" sz="2400" b="1" i="0" u="none" strike="noStrike" dirty="0">
+                <a:solidFill>
+                  <a:srgbClr val="132442"/>
                 </a:solidFill>
                 <a:latin typeface="Calibri"/>
                 <a:cs typeface="Calibri"/>
               </a:rPr>
-              <a:t>WRITER IS LIVE</a:t>
-            </a:r>
-            <a:endParaRPr lang="en-US" sz="1400" b="1" i="0" u="none" strike="noStrike" dirty="0">
-              <a:solidFill>
-                <a:srgbClr val="FFFFFF"/>
-              </a:solidFill>
-              <a:latin typeface="Calibri"/>
-              <a:cs typeface="Calibri"/>
-            </a:endParaRPr>
-          </a:p>
-        </p:txBody>
-      </p:sp>
-      <p:sp>
-        <p:nvSpPr>
-          <p:cNvPr id="14" name="TextBox 17"/>
+              <a:t>Writer</a:t>
+            </a:r>
+            <a:endParaRPr lang="en-US" sz="2400" b="1" i="0" u="none" strike="noStrike" dirty="0">
+              <a:solidFill>
+                <a:srgbClr val="132442"/>
+              </a:solidFill>
+              <a:latin typeface="Calibri"/>
+              <a:cs typeface="Calibri"/>
+            </a:endParaRPr>
+          </a:p>
+        </p:txBody>
+      </p:sp>
+      <p:sp>
+        <p:nvSpPr>
+          <p:cNvPr id="9" name="TextBox 12"/>
           <p:cNvSpPr txBox="1"/>
           <p:nvPr/>
         </p:nvSpPr>
         <p:spPr>
           <a:xfrm>
-            <a:off x="406400" y="7480300"/>
-            <a:ext cx="2286000" cy="1663700"/>
+            <a:off x="584200" y="7556500"/>
+            <a:ext cx="1270000" cy="1587500"/>
           </a:xfrm>
           <a:prstGeom prst="rect">
             <a:avLst/>
@@ -2938,15 +2695,64 @@
               <a:buNone/>
             </a:pPr>
             <a:r>
-              <a:rPr lang="en-US" sz="1800" b="0" i="0" u="none" strike="noStrike" dirty="0">
-                <a:solidFill>
-                  <a:srgbClr val="FFFFFF"/>
+              <a:rPr lang="en-US" sz="1300" b="0" i="0" u="none" strike="noStrike" dirty="0">
+                <a:solidFill>
+                  <a:srgbClr val="536782"/>
                 </a:solidFill>
                 <a:latin typeface="Calibri"/>
                 <a:cs typeface="Calibri"/>
               </a:rPr>
-              <a:t>A fresh page.</a:t>
-            </a:r>
+              <a:t>Documents</a:t>
+            </a:r>
+            <a:endParaRPr lang="en-US" sz="1300" b="0" i="0" u="none" strike="noStrike" dirty="0">
+              <a:solidFill>
+                <a:srgbClr val="536782"/>
+              </a:solidFill>
+              <a:latin typeface="Calibri"/>
+              <a:cs typeface="Calibri"/>
+            </a:endParaRPr>
+          </a:p>
+        </p:txBody>
+      </p:sp>
+      <p:sp>
+        <p:nvSpPr>
+          <p:cNvPr id="10" name="Rounded Rectangle 13"/>
+          <p:cNvSpPr/>
+          <p:nvPr/>
+        </p:nvSpPr>
+        <p:spPr>
+          <a:xfrm>
+            <a:off x="2082800" y="6096000"/>
+            <a:ext cx="1549400" cy="1981200"/>
+          </a:xfrm>
+          <a:prstGeom prst="roundRect">
+            <a:avLst/>
+          </a:prstGeom>
+          <a:solidFill>
+            <a:srgbClr val="FFFFFF"/>
+          </a:solidFill>
+          <a:ln>
+            <a:noFill/>
+          </a:ln>
+        </p:spPr>
+        <p:txBody>
+          <a:bodyPr wrap="square" lIns="91440" tIns="45720" rIns="91440" bIns="45720" anchor="ctr" rtlCol="0">
+            <a:noAutofit/>
+          </a:bodyPr>
+          <a:lstStyle/>
+          <a:p>
+            <a:pPr algn="ctr" marL="0" indent="0">
+              <a:lnSpc>
+                <a:spcPct val="100000"/>
+              </a:lnSpc>
+              <a:spcBef>
+                <a:spcPts val="0"/>
+              </a:spcBef>
+              <a:spcAft>
+                <a:spcPts val="0"/>
+              </a:spcAft>
+              <a:buNone/>
+            </a:pPr>
             <a:endParaRPr lang="en-US" sz="1800" b="0" i="0" u="none" strike="noStrike" dirty="0">
               <a:solidFill>
                 <a:srgbClr val="FFFFFF"/>
@@ -2955,6 +2761,81 @@
               <a:cs typeface="Calibri"/>
             </a:endParaRPr>
           </a:p>
+        </p:txBody>
+      </p:sp>
+      <p:sp>
+        <p:nvSpPr>
+          <p:cNvPr id="11" name="Rounded Rectangle 14"/>
+          <p:cNvSpPr/>
+          <p:nvPr/>
+        </p:nvSpPr>
+        <p:spPr>
+          <a:xfrm>
+            <a:off x="2260600" y="6273800"/>
+            <a:ext cx="533400" cy="533400"/>
+          </a:xfrm>
+          <a:prstGeom prst="roundRect">
+            <a:avLst/>
+          </a:prstGeom>
+          <a:solidFill>
+            <a:srgbClr val="E45B35"/>
+          </a:solidFill>
+          <a:ln>
+            <a:noFill/>
+          </a:ln>
+        </p:spPr>
+        <p:txBody>
+          <a:bodyPr wrap="square" lIns="91440" tIns="45720" rIns="91440" bIns="45720" anchor="ctr" rtlCol="0">
+            <a:noAutofit/>
+          </a:bodyPr>
+          <a:lstStyle/>
+          <a:p>
+            <a:pPr algn="ctr" marL="0" indent="0">
+              <a:lnSpc>
+                <a:spcPct val="100000"/>
+              </a:lnSpc>
+              <a:spcBef>
+                <a:spcPts val="0"/>
+              </a:spcBef>
+              <a:spcAft>
+                <a:spcPts val="0"/>
+              </a:spcAft>
+              <a:buNone/>
+            </a:pPr>
+            <a:endParaRPr lang="en-US" sz="1800" b="0" i="0" u="none" strike="noStrike" dirty="0">
+              <a:solidFill>
+                <a:srgbClr val="FFFFFF"/>
+              </a:solidFill>
+              <a:latin typeface="Calibri"/>
+              <a:cs typeface="Calibri"/>
+            </a:endParaRPr>
+          </a:p>
+        </p:txBody>
+      </p:sp>
+      <p:sp>
+        <p:nvSpPr>
+          <p:cNvPr id="12" name="TextBox 15"/>
+          <p:cNvSpPr txBox="1"/>
+          <p:nvPr/>
+        </p:nvSpPr>
+        <p:spPr>
+          <a:xfrm>
+            <a:off x="2374900" y="6299200"/>
+            <a:ext cx="711200" cy="2844800"/>
+          </a:xfrm>
+          <a:prstGeom prst="rect">
+            <a:avLst/>
+          </a:prstGeom>
+          <a:noFill/>
+          <a:ln>
+            <a:noFill/>
+          </a:ln>
+        </p:spPr>
+        <p:txBody>
+          <a:bodyPr wrap="square" lIns="0" tIns="0" rIns="0" bIns="0" anchor="t" rtlCol="0">
+            <a:spAutoFit/>
+          </a:bodyPr>
+          <a:lstStyle/>
           <a:p>
             <a:pPr algn="l" marL="0" indent="0">
               <a:lnSpc>
@@ -2969,16 +2850,456 @@
               <a:buNone/>
             </a:pPr>
             <a:r>
-              <a:rPr lang="en-US" sz="1800" b="0" i="0" u="none" strike="noStrike" dirty="0">
+              <a:rPr lang="en-US" sz="2900" b="1" i="0" u="none" strike="noStrike" dirty="0">
                 <a:solidFill>
                   <a:srgbClr val="FFFFFF"/>
                 </a:solidFill>
                 <a:latin typeface="Calibri"/>
                 <a:cs typeface="Calibri"/>
               </a:rPr>
-              <a:t>A familiar feel.</a:t>
-            </a:r>
+              <a:t>S</a:t>
+            </a:r>
+            <a:endParaRPr lang="en-US" sz="2900" b="1" i="0" u="none" strike="noStrike" dirty="0">
+              <a:solidFill>
+                <a:srgbClr val="FFFFFF"/>
+              </a:solidFill>
+              <a:latin typeface="Calibri"/>
+              <a:cs typeface="Calibri"/>
+            </a:endParaRPr>
+          </a:p>
+        </p:txBody>
+      </p:sp>
+      <p:sp>
+        <p:nvSpPr>
+          <p:cNvPr id="13" name="TextBox 16"/>
+          <p:cNvSpPr txBox="1"/>
+          <p:nvPr/>
+        </p:nvSpPr>
+        <p:spPr>
+          <a:xfrm>
+            <a:off x="2260600" y="7023100"/>
+            <a:ext cx="1270000" cy="2120900"/>
+          </a:xfrm>
+          <a:prstGeom prst="rect">
+            <a:avLst/>
+          </a:prstGeom>
+          <a:noFill/>
+          <a:ln>
+            <a:noFill/>
+          </a:ln>
+        </p:spPr>
+        <p:txBody>
+          <a:bodyPr wrap="square" lIns="0" tIns="0" rIns="0" bIns="0" anchor="t" rtlCol="0">
+            <a:spAutoFit/>
+          </a:bodyPr>
+          <a:lstStyle/>
+          <a:p>
+            <a:pPr algn="l" marL="0" indent="0">
+              <a:lnSpc>
+                <a:spcPct val="100000"/>
+              </a:lnSpc>
+              <a:spcBef>
+                <a:spcPts val="0"/>
+              </a:spcBef>
+              <a:spcAft>
+                <a:spcPts val="0"/>
+              </a:spcAft>
+              <a:buNone/>
+            </a:pPr>
+            <a:r>
+              <a:rPr lang="en-US" sz="2400" b="1" i="0" u="none" strike="noStrike" dirty="0">
+                <a:solidFill>
+                  <a:srgbClr val="132442"/>
+                </a:solidFill>
+                <a:latin typeface="Calibri"/>
+                <a:cs typeface="Calibri"/>
+              </a:rPr>
+              <a:t>Slides</a:t>
+            </a:r>
+            <a:endParaRPr lang="en-US" sz="2400" b="1" i="0" u="none" strike="noStrike" dirty="0">
+              <a:solidFill>
+                <a:srgbClr val="132442"/>
+              </a:solidFill>
+              <a:latin typeface="Calibri"/>
+              <a:cs typeface="Calibri"/>
+            </a:endParaRPr>
+          </a:p>
+        </p:txBody>
+      </p:sp>
+      <p:sp>
+        <p:nvSpPr>
+          <p:cNvPr id="14" name="TextBox 17"/>
+          <p:cNvSpPr txBox="1"/>
+          <p:nvPr/>
+        </p:nvSpPr>
+        <p:spPr>
+          <a:xfrm>
+            <a:off x="2260600" y="7556500"/>
+            <a:ext cx="1270000" cy="1587500"/>
+          </a:xfrm>
+          <a:prstGeom prst="rect">
+            <a:avLst/>
+          </a:prstGeom>
+          <a:noFill/>
+          <a:ln>
+            <a:noFill/>
+          </a:ln>
+        </p:spPr>
+        <p:txBody>
+          <a:bodyPr wrap="square" lIns="0" tIns="0" rIns="0" bIns="0" anchor="t" rtlCol="0">
+            <a:spAutoFit/>
+          </a:bodyPr>
+          <a:lstStyle/>
+          <a:p>
+            <a:pPr algn="l" marL="0" indent="0">
+              <a:lnSpc>
+                <a:spcPct val="100000"/>
+              </a:lnSpc>
+              <a:spcBef>
+                <a:spcPts val="0"/>
+              </a:spcBef>
+              <a:spcAft>
+                <a:spcPts val="0"/>
+              </a:spcAft>
+              <a:buNone/>
+            </a:pPr>
+            <a:r>
+              <a:rPr lang="en-US" sz="1300" b="0" i="0" u="none" strike="noStrike" dirty="0">
+                <a:solidFill>
+                  <a:srgbClr val="536782"/>
+                </a:solidFill>
+                <a:latin typeface="Calibri"/>
+                <a:cs typeface="Calibri"/>
+              </a:rPr>
+              <a:t>Presentations</a:t>
+            </a:r>
+            <a:endParaRPr lang="en-US" sz="1300" b="0" i="0" u="none" strike="noStrike" dirty="0">
+              <a:solidFill>
+                <a:srgbClr val="536782"/>
+              </a:solidFill>
+              <a:latin typeface="Calibri"/>
+              <a:cs typeface="Calibri"/>
+            </a:endParaRPr>
+          </a:p>
+        </p:txBody>
+      </p:sp>
+      <p:sp>
+        <p:nvSpPr>
+          <p:cNvPr id="15" name="Rounded Rectangle 18"/>
+          <p:cNvSpPr/>
+          <p:nvPr/>
+        </p:nvSpPr>
+        <p:spPr>
+          <a:xfrm>
+            <a:off x="3759200" y="6096000"/>
+            <a:ext cx="1549400" cy="1981200"/>
+          </a:xfrm>
+          <a:prstGeom prst="roundRect">
+            <a:avLst/>
+          </a:prstGeom>
+          <a:solidFill>
+            <a:srgbClr val="FFFFFF"/>
+          </a:solidFill>
+          <a:ln>
+            <a:noFill/>
+          </a:ln>
+        </p:spPr>
+        <p:txBody>
+          <a:bodyPr wrap="square" lIns="91440" tIns="45720" rIns="91440" bIns="45720" anchor="ctr" rtlCol="0">
+            <a:noAutofit/>
+          </a:bodyPr>
+          <a:lstStyle/>
+          <a:p>
+            <a:pPr algn="ctr" marL="0" indent="0">
+              <a:lnSpc>
+                <a:spcPct val="100000"/>
+              </a:lnSpc>
+              <a:spcBef>
+                <a:spcPts val="0"/>
+              </a:spcBef>
+              <a:spcAft>
+                <a:spcPts val="0"/>
+              </a:spcAft>
+              <a:buNone/>
+            </a:pPr>
             <a:endParaRPr lang="en-US" sz="1800" b="0" i="0" u="none" strike="noStrike" dirty="0">
+              <a:solidFill>
+                <a:srgbClr val="FFFFFF"/>
+              </a:solidFill>
+              <a:latin typeface="Calibri"/>
+              <a:cs typeface="Calibri"/>
+            </a:endParaRPr>
+          </a:p>
+        </p:txBody>
+      </p:sp>
+      <p:sp>
+        <p:nvSpPr>
+          <p:cNvPr id="16" name="Rounded Rectangle 19"/>
+          <p:cNvSpPr/>
+          <p:nvPr/>
+        </p:nvSpPr>
+        <p:spPr>
+          <a:xfrm>
+            <a:off x="3937000" y="6273800"/>
+            <a:ext cx="533400" cy="533400"/>
+          </a:xfrm>
+          <a:prstGeom prst="roundRect">
+            <a:avLst/>
+          </a:prstGeom>
+          <a:solidFill>
+            <a:srgbClr val="13794D"/>
+          </a:solidFill>
+          <a:ln>
+            <a:noFill/>
+          </a:ln>
+        </p:spPr>
+        <p:txBody>
+          <a:bodyPr wrap="square" lIns="91440" tIns="45720" rIns="91440" bIns="45720" anchor="ctr" rtlCol="0">
+            <a:noAutofit/>
+          </a:bodyPr>
+          <a:lstStyle/>
+          <a:p>
+            <a:pPr algn="ctr" marL="0" indent="0">
+              <a:lnSpc>
+                <a:spcPct val="100000"/>
+              </a:lnSpc>
+              <a:spcBef>
+                <a:spcPts val="0"/>
+              </a:spcBef>
+              <a:spcAft>
+                <a:spcPts val="0"/>
+              </a:spcAft>
+              <a:buNone/>
+            </a:pPr>
+            <a:endParaRPr lang="en-US" sz="1800" b="0" i="0" u="none" strike="noStrike" dirty="0">
+              <a:solidFill>
+                <a:srgbClr val="FFFFFF"/>
+              </a:solidFill>
+              <a:latin typeface="Calibri"/>
+              <a:cs typeface="Calibri"/>
+            </a:endParaRPr>
+          </a:p>
+        </p:txBody>
+      </p:sp>
+      <p:sp>
+        <p:nvSpPr>
+          <p:cNvPr id="17" name="TextBox 20"/>
+          <p:cNvSpPr txBox="1"/>
+          <p:nvPr/>
+        </p:nvSpPr>
+        <p:spPr>
+          <a:xfrm>
+            <a:off x="4051300" y="6299200"/>
+            <a:ext cx="711200" cy="2844800"/>
+          </a:xfrm>
+          <a:prstGeom prst="rect">
+            <a:avLst/>
+          </a:prstGeom>
+          <a:noFill/>
+          <a:ln>
+            <a:noFill/>
+          </a:ln>
+        </p:spPr>
+        <p:txBody>
+          <a:bodyPr wrap="square" lIns="0" tIns="0" rIns="0" bIns="0" anchor="t" rtlCol="0">
+            <a:spAutoFit/>
+          </a:bodyPr>
+          <a:lstStyle/>
+          <a:p>
+            <a:pPr algn="l" marL="0" indent="0">
+              <a:lnSpc>
+                <a:spcPct val="100000"/>
+              </a:lnSpc>
+              <a:spcBef>
+                <a:spcPts val="0"/>
+              </a:spcBef>
+              <a:spcAft>
+                <a:spcPts val="0"/>
+              </a:spcAft>
+              <a:buNone/>
+            </a:pPr>
+            <a:r>
+              <a:rPr lang="en-US" sz="2900" b="1" i="0" u="none" strike="noStrike" dirty="0">
+                <a:solidFill>
+                  <a:srgbClr val="FFFFFF"/>
+                </a:solidFill>
+                <a:latin typeface="Calibri"/>
+                <a:cs typeface="Calibri"/>
+              </a:rPr>
+              <a:t>#</a:t>
+            </a:r>
+            <a:endParaRPr lang="en-US" sz="2900" b="1" i="0" u="none" strike="noStrike" dirty="0">
+              <a:solidFill>
+                <a:srgbClr val="FFFFFF"/>
+              </a:solidFill>
+              <a:latin typeface="Calibri"/>
+              <a:cs typeface="Calibri"/>
+            </a:endParaRPr>
+          </a:p>
+        </p:txBody>
+      </p:sp>
+      <p:sp>
+        <p:nvSpPr>
+          <p:cNvPr id="18" name="TextBox 21"/>
+          <p:cNvSpPr txBox="1"/>
+          <p:nvPr/>
+        </p:nvSpPr>
+        <p:spPr>
+          <a:xfrm>
+            <a:off x="3937000" y="7023100"/>
+            <a:ext cx="1270000" cy="2120900"/>
+          </a:xfrm>
+          <a:prstGeom prst="rect">
+            <a:avLst/>
+          </a:prstGeom>
+          <a:noFill/>
+          <a:ln>
+            <a:noFill/>
+          </a:ln>
+        </p:spPr>
+        <p:txBody>
+          <a:bodyPr wrap="square" lIns="0" tIns="0" rIns="0" bIns="0" anchor="t" rtlCol="0">
+            <a:spAutoFit/>
+          </a:bodyPr>
+          <a:lstStyle/>
+          <a:p>
+            <a:pPr algn="l" marL="0" indent="0">
+              <a:lnSpc>
+                <a:spcPct val="100000"/>
+              </a:lnSpc>
+              <a:spcBef>
+                <a:spcPts val="0"/>
+              </a:spcBef>
+              <a:spcAft>
+                <a:spcPts val="0"/>
+              </a:spcAft>
+              <a:buNone/>
+            </a:pPr>
+            <a:r>
+              <a:rPr lang="en-US" sz="2400" b="1" i="0" u="none" strike="noStrike" dirty="0">
+                <a:solidFill>
+                  <a:srgbClr val="132442"/>
+                </a:solidFill>
+                <a:latin typeface="Calibri"/>
+                <a:cs typeface="Calibri"/>
+              </a:rPr>
+              <a:t>Sheets</a:t>
+            </a:r>
+            <a:endParaRPr lang="en-US" sz="2400" b="1" i="0" u="none" strike="noStrike" dirty="0">
+              <a:solidFill>
+                <a:srgbClr val="132442"/>
+              </a:solidFill>
+              <a:latin typeface="Calibri"/>
+              <a:cs typeface="Calibri"/>
+            </a:endParaRPr>
+          </a:p>
+        </p:txBody>
+      </p:sp>
+      <p:sp>
+        <p:nvSpPr>
+          <p:cNvPr id="19" name="TextBox 22"/>
+          <p:cNvSpPr txBox="1"/>
+          <p:nvPr/>
+        </p:nvSpPr>
+        <p:spPr>
+          <a:xfrm>
+            <a:off x="3937000" y="7556500"/>
+            <a:ext cx="1270000" cy="1587500"/>
+          </a:xfrm>
+          <a:prstGeom prst="rect">
+            <a:avLst/>
+          </a:prstGeom>
+          <a:noFill/>
+          <a:ln>
+            <a:noFill/>
+          </a:ln>
+        </p:spPr>
+        <p:txBody>
+          <a:bodyPr wrap="square" lIns="0" tIns="0" rIns="0" bIns="0" anchor="t" rtlCol="0">
+            <a:spAutoFit/>
+          </a:bodyPr>
+          <a:lstStyle/>
+          <a:p>
+            <a:pPr algn="l" marL="0" indent="0">
+              <a:lnSpc>
+                <a:spcPct val="100000"/>
+              </a:lnSpc>
+              <a:spcBef>
+                <a:spcPts val="0"/>
+              </a:spcBef>
+              <a:spcAft>
+                <a:spcPts val="0"/>
+              </a:spcAft>
+              <a:buNone/>
+            </a:pPr>
+            <a:r>
+              <a:rPr lang="en-US" sz="1300" b="0" i="0" u="none" strike="noStrike" dirty="0">
+                <a:solidFill>
+                  <a:srgbClr val="536782"/>
+                </a:solidFill>
+                <a:latin typeface="Calibri"/>
+                <a:cs typeface="Calibri"/>
+              </a:rPr>
+              <a:t>Spreadsheets</a:t>
+            </a:r>
+            <a:endParaRPr lang="en-US" sz="1300" b="0" i="0" u="none" strike="noStrike" dirty="0">
+              <a:solidFill>
+                <a:srgbClr val="536782"/>
+              </a:solidFill>
+              <a:latin typeface="Calibri"/>
+              <a:cs typeface="Calibri"/>
+            </a:endParaRPr>
+          </a:p>
+        </p:txBody>
+      </p:sp>
+      <p:sp>
+        <p:nvSpPr>
+          <p:cNvPr id="20" name="TextBox 23"/>
+          <p:cNvSpPr txBox="1"/>
+          <p:nvPr/>
+        </p:nvSpPr>
+        <p:spPr>
+          <a:xfrm>
+            <a:off x="406400" y="8458200"/>
+            <a:ext cx="4902200" cy="685800"/>
+          </a:xfrm>
+          <a:prstGeom prst="rect">
+            <a:avLst/>
+          </a:prstGeom>
+          <a:noFill/>
+          <a:ln>
+            <a:noFill/>
+          </a:ln>
+        </p:spPr>
+        <p:txBody>
+          <a:bodyPr wrap="square" lIns="0" tIns="0" rIns="0" bIns="0" anchor="t" rtlCol="0">
+            <a:spAutoFit/>
+          </a:bodyPr>
+          <a:lstStyle/>
+          <a:p>
+            <a:pPr algn="l" marL="0" indent="0">
+              <a:lnSpc>
+                <a:spcPct val="100000"/>
+              </a:lnSpc>
+              <a:spcBef>
+                <a:spcPts val="0"/>
+              </a:spcBef>
+              <a:spcAft>
+                <a:spcPts val="0"/>
+              </a:spcAft>
+              <a:buNone/>
+            </a:pPr>
+            <a:r>
+              <a:rPr lang="en-US" sz="1300" b="1" i="0" u="none" strike="noStrike" dirty="0">
+                <a:solidFill>
+                  <a:srgbClr val="FFFFFF"/>
+                </a:solidFill>
+                <a:latin typeface="Calibri"/>
+                <a:cs typeface="Calibri"/>
+              </a:rPr>
+              <a:t>THREE APPS. ONE OPEN SOURCE SUITE.</a:t>
+            </a:r>
+            <a:endParaRPr lang="en-US" sz="1300" b="1" i="0" u="none" strike="noStrike" dirty="0">
               <a:solidFill>
                 <a:srgbClr val="FFFFFF"/>
               </a:solidFill>
@@ -3026,7 +3347,7 @@
       </p:grpSpPr>
       <p:sp>
         <p:nvSpPr>
-          <p:cNvPr id="2" name="TextBox 19"/>
+          <p:cNvPr id="2" name="TextBox 25"/>
           <p:cNvSpPr txBox="1"/>
           <p:nvPr/>
         </p:nvSpPr>
@@ -3083,7 +3404,7 @@
       </p:sp>
       <p:sp>
         <p:nvSpPr>
-          <p:cNvPr id="3" name="TextBox 20"/>
+          <p:cNvPr id="3" name="TextBox 26"/>
           <p:cNvSpPr txBox="1"/>
           <p:nvPr/>
         </p:nvSpPr>
@@ -3171,7 +3492,7 @@
       </p:sp>
       <p:sp>
         <p:nvSpPr>
-          <p:cNvPr id="4" name="TextBox 21"/>
+          <p:cNvPr id="4" name="TextBox 27"/>
           <p:cNvSpPr txBox="1"/>
           <p:nvPr/>
         </p:nvSpPr>
@@ -3259,7 +3580,7 @@
       </p:sp>
       <p:pic>
         <p:nvPicPr>
-          <p:cNvPr id="5" name="Picture 22"/>
+          <p:cNvPr id="5" name="Picture 28"/>
           <p:cNvPicPr>
             <a:picLocks noChangeAspect="1"/>
           </p:cNvPicPr>
@@ -3283,7 +3604,7 @@
       </p:pic>
       <p:sp>
         <p:nvSpPr>
-          <p:cNvPr id="6" name="TextBox 23"/>
+          <p:cNvPr id="6" name="TextBox 29"/>
           <p:cNvSpPr txBox="1"/>
           <p:nvPr/>
         </p:nvSpPr>
@@ -3350,6 +3671,2394 @@
 </file>
 
 <file path=ppt/slides/slide3.xml><?xml version="1.0" encoding="utf-8"?>
+<p:sld xmlns:a="http://schemas.openxmlformats.org/drawingml/2006/main" xmlns:r="http://schemas.openxmlformats.org/officeDocument/2006/relationships" xmlns:p="http://schemas.openxmlformats.org/presentationml/2006/main">
+  <p:cSld>
+    <p:bg>
+      <p:bgPr>
+        <a:solidFill>
+          <a:srgbClr val="FFF3ED"/>
+        </a:solidFill>
+        <a:effectLst/>
+      </p:bgPr>
+    </p:bg>
+    <p:spTree>
+      <p:nvGrpSpPr>
+        <p:cNvPr id="1" name=""/>
+        <p:cNvGrpSpPr/>
+        <p:nvPr/>
+      </p:nvGrpSpPr>
+      <p:grpSpPr>
+        <a:xfrm>
+          <a:off x="0" y="0"/>
+          <a:ext cx="0" cy="0"/>
+          <a:chOff x="0" y="0"/>
+          <a:chExt cx="0" cy="0"/>
+        </a:xfrm>
+      </p:grpSpPr>
+      <p:sp>
+        <p:nvSpPr>
+          <p:cNvPr id="2" name="TextBox 31"/>
+          <p:cNvSpPr txBox="1"/>
+          <p:nvPr/>
+        </p:nvSpPr>
+        <p:spPr>
+          <a:xfrm>
+            <a:off x="406400" y="508000"/>
+            <a:ext cx="4902200" cy="8636000"/>
+          </a:xfrm>
+          <a:prstGeom prst="rect">
+            <a:avLst/>
+          </a:prstGeom>
+          <a:noFill/>
+          <a:ln>
+            <a:noFill/>
+          </a:ln>
+        </p:spPr>
+        <p:txBody>
+          <a:bodyPr wrap="square" lIns="0" tIns="0" rIns="0" bIns="0" anchor="t" rtlCol="0">
+            <a:spAutoFit/>
+          </a:bodyPr>
+          <a:lstStyle/>
+          <a:p>
+            <a:pPr algn="l" marL="0" indent="0">
+              <a:lnSpc>
+                <a:spcPct val="100000"/>
+              </a:lnSpc>
+              <a:spcBef>
+                <a:spcPts val="0"/>
+              </a:spcBef>
+              <a:spcAft>
+                <a:spcPts val="0"/>
+              </a:spcAft>
+              <a:buNone/>
+            </a:pPr>
+            <a:r>
+              <a:rPr lang="en-US" sz="1300" b="1" i="0" u="none" strike="noStrike" dirty="0">
+                <a:solidFill>
+                  <a:srgbClr val="C74724"/>
+                </a:solidFill>
+                <a:latin typeface="Calibri"/>
+                <a:cs typeface="Calibri"/>
+              </a:rPr>
+              <a:t>02  /  MEET SLIDES</a:t>
+            </a:r>
+            <a:endParaRPr lang="en-US" sz="1300" b="1" i="0" u="none" strike="noStrike" dirty="0">
+              <a:solidFill>
+                <a:srgbClr val="C74724"/>
+              </a:solidFill>
+              <a:latin typeface="Calibri"/>
+              <a:cs typeface="Calibri"/>
+            </a:endParaRPr>
+          </a:p>
+        </p:txBody>
+      </p:sp>
+      <p:sp>
+        <p:nvSpPr>
+          <p:cNvPr id="3" name="TextBox 32"/>
+          <p:cNvSpPr txBox="1"/>
+          <p:nvPr/>
+        </p:nvSpPr>
+        <p:spPr>
+          <a:xfrm>
+            <a:off x="406400" y="1193800"/>
+            <a:ext cx="5080000" cy="7950200"/>
+          </a:xfrm>
+          <a:prstGeom prst="rect">
+            <a:avLst/>
+          </a:prstGeom>
+          <a:noFill/>
+          <a:ln>
+            <a:noFill/>
+          </a:ln>
+        </p:spPr>
+        <p:txBody>
+          <a:bodyPr wrap="square" lIns="0" tIns="0" rIns="0" bIns="0" anchor="t" rtlCol="0">
+            <a:spAutoFit/>
+          </a:bodyPr>
+          <a:lstStyle/>
+          <a:p>
+            <a:pPr algn="l" marL="0" indent="0">
+              <a:lnSpc>
+                <a:spcPct val="100000"/>
+              </a:lnSpc>
+              <a:spcBef>
+                <a:spcPts val="0"/>
+              </a:spcBef>
+              <a:spcAft>
+                <a:spcPts val="0"/>
+              </a:spcAft>
+              <a:buNone/>
+            </a:pPr>
+            <a:r>
+              <a:rPr lang="en-US" sz="6600" b="1" i="0" u="none" strike="noStrike" dirty="0">
+                <a:solidFill>
+                  <a:srgbClr val="132442"/>
+                </a:solidFill>
+                <a:latin typeface="Calibri"/>
+                <a:cs typeface="Calibri"/>
+              </a:rPr>
+              <a:t>Make your</a:t>
+            </a:r>
+            <a:endParaRPr lang="en-US" sz="6600" b="1" i="0" u="none" strike="noStrike" dirty="0">
+              <a:solidFill>
+                <a:srgbClr val="132442"/>
+              </a:solidFill>
+              <a:latin typeface="Calibri"/>
+              <a:cs typeface="Calibri"/>
+            </a:endParaRPr>
+          </a:p>
+          <a:p>
+            <a:pPr algn="l" marL="0" indent="0">
+              <a:lnSpc>
+                <a:spcPct val="100000"/>
+              </a:lnSpc>
+              <a:spcBef>
+                <a:spcPts val="0"/>
+              </a:spcBef>
+              <a:spcAft>
+                <a:spcPts val="0"/>
+              </a:spcAft>
+              <a:buNone/>
+            </a:pPr>
+            <a:r>
+              <a:rPr lang="en-US" sz="6600" b="1" i="0" u="none" strike="noStrike" dirty="0">
+                <a:solidFill>
+                  <a:srgbClr val="132442"/>
+                </a:solidFill>
+                <a:latin typeface="Calibri"/>
+                <a:cs typeface="Calibri"/>
+              </a:rPr>
+              <a:t>point.</a:t>
+            </a:r>
+            <a:endParaRPr lang="en-US" sz="6600" b="1" i="0" u="none" strike="noStrike" dirty="0">
+              <a:solidFill>
+                <a:srgbClr val="132442"/>
+              </a:solidFill>
+              <a:latin typeface="Calibri"/>
+              <a:cs typeface="Calibri"/>
+            </a:endParaRPr>
+          </a:p>
+        </p:txBody>
+      </p:sp>
+      <p:sp>
+        <p:nvSpPr>
+          <p:cNvPr id="4" name="TextBox 33"/>
+          <p:cNvSpPr txBox="1"/>
+          <p:nvPr/>
+        </p:nvSpPr>
+        <p:spPr>
+          <a:xfrm>
+            <a:off x="406400" y="7239000"/>
+            <a:ext cx="4953000" cy="1905000"/>
+          </a:xfrm>
+          <a:prstGeom prst="rect">
+            <a:avLst/>
+          </a:prstGeom>
+          <a:noFill/>
+          <a:ln>
+            <a:noFill/>
+          </a:ln>
+        </p:spPr>
+        <p:txBody>
+          <a:bodyPr wrap="square" lIns="0" tIns="0" rIns="0" bIns="0" anchor="t" rtlCol="0">
+            <a:spAutoFit/>
+          </a:bodyPr>
+          <a:lstStyle/>
+          <a:p>
+            <a:pPr algn="l" marL="0" indent="0">
+              <a:lnSpc>
+                <a:spcPct val="100000"/>
+              </a:lnSpc>
+              <a:spcBef>
+                <a:spcPts val="0"/>
+              </a:spcBef>
+              <a:spcAft>
+                <a:spcPts val="0"/>
+              </a:spcAft>
+              <a:buNone/>
+            </a:pPr>
+            <a:r>
+              <a:rPr lang="en-US" sz="2100" b="0" i="0" u="none" strike="noStrike" dirty="0">
+                <a:solidFill>
+                  <a:srgbClr val="536782"/>
+                </a:solidFill>
+                <a:latin typeface="Calibri"/>
+                <a:cs typeface="Calibri"/>
+              </a:rPr>
+              <a:t>Build a deck. Tell your story.</a:t>
+            </a:r>
+            <a:endParaRPr lang="en-US" sz="2100" b="0" i="0" u="none" strike="noStrike" dirty="0">
+              <a:solidFill>
+                <a:srgbClr val="536782"/>
+              </a:solidFill>
+              <a:latin typeface="Calibri"/>
+              <a:cs typeface="Calibri"/>
+            </a:endParaRPr>
+          </a:p>
+          <a:p>
+            <a:pPr algn="l" marL="0" indent="0">
+              <a:lnSpc>
+                <a:spcPct val="100000"/>
+              </a:lnSpc>
+              <a:spcBef>
+                <a:spcPts val="0"/>
+              </a:spcBef>
+              <a:spcAft>
+                <a:spcPts val="0"/>
+              </a:spcAft>
+              <a:buNone/>
+            </a:pPr>
+            <a:r>
+              <a:rPr lang="en-US" sz="2100" b="0" i="0" u="none" strike="noStrike" dirty="0">
+                <a:solidFill>
+                  <a:srgbClr val="536782"/>
+                </a:solidFill>
+                <a:latin typeface="Calibri"/>
+                <a:cs typeface="Calibri"/>
+              </a:rPr>
+              <a:t>Present it with confidence.</a:t>
+            </a:r>
+            <a:endParaRPr lang="en-US" sz="2100" b="0" i="0" u="none" strike="noStrike" dirty="0">
+              <a:solidFill>
+                <a:srgbClr val="536782"/>
+              </a:solidFill>
+              <a:latin typeface="Calibri"/>
+              <a:cs typeface="Calibri"/>
+            </a:endParaRPr>
+          </a:p>
+        </p:txBody>
+      </p:sp>
+      <p:sp>
+        <p:nvSpPr>
+          <p:cNvPr id="5" name="Rounded Rectangle 34"/>
+          <p:cNvSpPr/>
+          <p:nvPr/>
+        </p:nvSpPr>
+        <p:spPr>
+          <a:xfrm>
+            <a:off x="406400" y="3606800"/>
+            <a:ext cx="4902200" cy="3130967"/>
+          </a:xfrm>
+          <a:prstGeom prst="roundRect">
+            <a:avLst/>
+          </a:prstGeom>
+          <a:solidFill>
+            <a:srgbClr val="FFFFFF"/>
+          </a:solidFill>
+          <a:ln>
+            <a:noFill/>
+          </a:ln>
+        </p:spPr>
+        <p:txBody>
+          <a:bodyPr wrap="square" lIns="91440" tIns="45720" rIns="91440" bIns="45720" anchor="ctr" rtlCol="0">
+            <a:noAutofit/>
+          </a:bodyPr>
+          <a:lstStyle/>
+          <a:p>
+            <a:pPr algn="ctr" marL="0" indent="0">
+              <a:lnSpc>
+                <a:spcPct val="100000"/>
+              </a:lnSpc>
+              <a:spcBef>
+                <a:spcPts val="0"/>
+              </a:spcBef>
+              <a:spcAft>
+                <a:spcPts val="0"/>
+              </a:spcAft>
+              <a:buNone/>
+            </a:pPr>
+            <a:endParaRPr lang="en-US" sz="1800" b="0" i="0" u="none" strike="noStrike" dirty="0">
+              <a:solidFill>
+                <a:srgbClr val="FFFFFF"/>
+              </a:solidFill>
+              <a:latin typeface="Calibri"/>
+              <a:cs typeface="Calibri"/>
+            </a:endParaRPr>
+          </a:p>
+        </p:txBody>
+      </p:sp>
+      <p:sp>
+        <p:nvSpPr>
+          <p:cNvPr id="6" name="TextBox 35"/>
+          <p:cNvSpPr txBox="1"/>
+          <p:nvPr/>
+        </p:nvSpPr>
+        <p:spPr>
+          <a:xfrm>
+            <a:off x="719497" y="3848332"/>
+            <a:ext cx="4249170" cy="5295668"/>
+          </a:xfrm>
+          <a:prstGeom prst="rect">
+            <a:avLst/>
+          </a:prstGeom>
+          <a:noFill/>
+          <a:ln>
+            <a:noFill/>
+          </a:ln>
+        </p:spPr>
+        <p:txBody>
+          <a:bodyPr wrap="square" lIns="0" tIns="0" rIns="0" bIns="0" anchor="t" rtlCol="0">
+            <a:spAutoFit/>
+          </a:bodyPr>
+          <a:lstStyle/>
+          <a:p>
+            <a:pPr algn="l" marL="0" indent="0">
+              <a:lnSpc>
+                <a:spcPct val="100000"/>
+              </a:lnSpc>
+              <a:spcBef>
+                <a:spcPts val="0"/>
+              </a:spcBef>
+              <a:spcAft>
+                <a:spcPts val="0"/>
+              </a:spcAft>
+              <a:buNone/>
+            </a:pPr>
+            <a:r>
+              <a:rPr lang="en-US" sz="2958" b="1" i="0" u="none" strike="noStrike" dirty="0">
+                <a:solidFill>
+                  <a:srgbClr val="132442"/>
+                </a:solidFill>
+                <a:latin typeface="Calibri"/>
+                <a:cs typeface="Calibri"/>
+              </a:rPr>
+              <a:t>A clear idea.</a:t>
+            </a:r>
+            <a:endParaRPr lang="en-US" sz="2958" b="1" i="0" u="none" strike="noStrike" dirty="0">
+              <a:solidFill>
+                <a:srgbClr val="132442"/>
+              </a:solidFill>
+              <a:latin typeface="Calibri"/>
+              <a:cs typeface="Calibri"/>
+            </a:endParaRPr>
+          </a:p>
+        </p:txBody>
+      </p:sp>
+      <p:sp>
+        <p:nvSpPr>
+          <p:cNvPr id="7" name="TextBox 36"/>
+          <p:cNvSpPr txBox="1"/>
+          <p:nvPr/>
+        </p:nvSpPr>
+        <p:spPr>
+          <a:xfrm>
+            <a:off x="719497" y="4420851"/>
+            <a:ext cx="4249170" cy="4723149"/>
+          </a:xfrm>
+          <a:prstGeom prst="rect">
+            <a:avLst/>
+          </a:prstGeom>
+          <a:noFill/>
+          <a:ln>
+            <a:noFill/>
+          </a:ln>
+        </p:spPr>
+        <p:txBody>
+          <a:bodyPr wrap="square" lIns="0" tIns="0" rIns="0" bIns="0" anchor="t" rtlCol="0">
+            <a:spAutoFit/>
+          </a:bodyPr>
+          <a:lstStyle/>
+          <a:p>
+            <a:pPr algn="l" marL="0" indent="0">
+              <a:lnSpc>
+                <a:spcPct val="100000"/>
+              </a:lnSpc>
+              <a:spcBef>
+                <a:spcPts val="0"/>
+              </a:spcBef>
+              <a:spcAft>
+                <a:spcPts val="0"/>
+              </a:spcAft>
+              <a:buNone/>
+            </a:pPr>
+            <a:r>
+              <a:rPr lang="en-US" sz="1057" b="1" i="0" u="none" strike="noStrike" dirty="0">
+                <a:solidFill>
+                  <a:srgbClr val="C74724"/>
+                </a:solidFill>
+                <a:latin typeface="Calibri"/>
+                <a:cs typeface="Calibri"/>
+              </a:rPr>
+              <a:t>MAKE EVERY SLIDE COUNT</a:t>
+            </a:r>
+            <a:endParaRPr lang="en-US" sz="1057" b="1" i="0" u="none" strike="noStrike" dirty="0">
+              <a:solidFill>
+                <a:srgbClr val="C74724"/>
+              </a:solidFill>
+              <a:latin typeface="Calibri"/>
+              <a:cs typeface="Calibri"/>
+            </a:endParaRPr>
+          </a:p>
+        </p:txBody>
+      </p:sp>
+      <p:sp>
+        <p:nvSpPr>
+          <p:cNvPr id="8" name="Rounded Rectangle 37"/>
+          <p:cNvSpPr/>
+          <p:nvPr/>
+        </p:nvSpPr>
+        <p:spPr>
+          <a:xfrm>
+            <a:off x="782116" y="5610619"/>
+            <a:ext cx="554628" cy="626193"/>
+          </a:xfrm>
+          <a:prstGeom prst="roundRect">
+            <a:avLst/>
+          </a:prstGeom>
+          <a:solidFill>
+            <a:srgbClr val="FFCBB8"/>
+          </a:solidFill>
+          <a:ln>
+            <a:noFill/>
+          </a:ln>
+        </p:spPr>
+        <p:txBody>
+          <a:bodyPr wrap="square" lIns="91440" tIns="45720" rIns="91440" bIns="45720" anchor="ctr" rtlCol="0">
+            <a:noAutofit/>
+          </a:bodyPr>
+          <a:lstStyle/>
+          <a:p>
+            <a:pPr algn="ctr" marL="0" indent="0">
+              <a:lnSpc>
+                <a:spcPct val="100000"/>
+              </a:lnSpc>
+              <a:spcBef>
+                <a:spcPts val="0"/>
+              </a:spcBef>
+              <a:spcAft>
+                <a:spcPts val="0"/>
+              </a:spcAft>
+              <a:buNone/>
+            </a:pPr>
+            <a:endParaRPr lang="en-US" sz="1800" b="0" i="0" u="none" strike="noStrike" dirty="0">
+              <a:solidFill>
+                <a:srgbClr val="FFFFFF"/>
+              </a:solidFill>
+              <a:latin typeface="Calibri"/>
+              <a:cs typeface="Calibri"/>
+            </a:endParaRPr>
+          </a:p>
+        </p:txBody>
+      </p:sp>
+      <p:sp>
+        <p:nvSpPr>
+          <p:cNvPr id="9" name="Rounded Rectangle 38"/>
+          <p:cNvSpPr/>
+          <p:nvPr/>
+        </p:nvSpPr>
+        <p:spPr>
+          <a:xfrm>
+            <a:off x="1605113" y="5225957"/>
+            <a:ext cx="554628" cy="1010855"/>
+          </a:xfrm>
+          <a:prstGeom prst="roundRect">
+            <a:avLst/>
+          </a:prstGeom>
+          <a:solidFill>
+            <a:srgbClr val="F2906D"/>
+          </a:solidFill>
+          <a:ln>
+            <a:noFill/>
+          </a:ln>
+        </p:spPr>
+        <p:txBody>
+          <a:bodyPr wrap="square" lIns="91440" tIns="45720" rIns="91440" bIns="45720" anchor="ctr" rtlCol="0">
+            <a:noAutofit/>
+          </a:bodyPr>
+          <a:lstStyle/>
+          <a:p>
+            <a:pPr algn="ctr" marL="0" indent="0">
+              <a:lnSpc>
+                <a:spcPct val="100000"/>
+              </a:lnSpc>
+              <a:spcBef>
+                <a:spcPts val="0"/>
+              </a:spcBef>
+              <a:spcAft>
+                <a:spcPts val="0"/>
+              </a:spcAft>
+              <a:buNone/>
+            </a:pPr>
+            <a:endParaRPr lang="en-US" sz="1800" b="0" i="0" u="none" strike="noStrike" dirty="0">
+              <a:solidFill>
+                <a:srgbClr val="FFFFFF"/>
+              </a:solidFill>
+              <a:latin typeface="Calibri"/>
+              <a:cs typeface="Calibri"/>
+            </a:endParaRPr>
+          </a:p>
+        </p:txBody>
+      </p:sp>
+      <p:sp>
+        <p:nvSpPr>
+          <p:cNvPr id="10" name="Rounded Rectangle 39"/>
+          <p:cNvSpPr/>
+          <p:nvPr/>
+        </p:nvSpPr>
+        <p:spPr>
+          <a:xfrm>
+            <a:off x="2428110" y="4769731"/>
+            <a:ext cx="554628" cy="1467082"/>
+          </a:xfrm>
+          <a:prstGeom prst="roundRect">
+            <a:avLst/>
+          </a:prstGeom>
+          <a:solidFill>
+            <a:srgbClr val="C74724"/>
+          </a:solidFill>
+          <a:ln>
+            <a:noFill/>
+          </a:ln>
+        </p:spPr>
+        <p:txBody>
+          <a:bodyPr wrap="square" lIns="91440" tIns="45720" rIns="91440" bIns="45720" anchor="ctr" rtlCol="0">
+            <a:noAutofit/>
+          </a:bodyPr>
+          <a:lstStyle/>
+          <a:p>
+            <a:pPr algn="ctr" marL="0" indent="0">
+              <a:lnSpc>
+                <a:spcPct val="100000"/>
+              </a:lnSpc>
+              <a:spcBef>
+                <a:spcPts val="0"/>
+              </a:spcBef>
+              <a:spcAft>
+                <a:spcPts val="0"/>
+              </a:spcAft>
+              <a:buNone/>
+            </a:pPr>
+            <a:endParaRPr lang="en-US" sz="1800" b="0" i="0" u="none" strike="noStrike" dirty="0">
+              <a:solidFill>
+                <a:srgbClr val="FFFFFF"/>
+              </a:solidFill>
+              <a:latin typeface="Calibri"/>
+              <a:cs typeface="Calibri"/>
+            </a:endParaRPr>
+          </a:p>
+        </p:txBody>
+      </p:sp>
+      <p:sp>
+        <p:nvSpPr>
+          <p:cNvPr id="11" name="TextBox 40"/>
+          <p:cNvSpPr txBox="1"/>
+          <p:nvPr/>
+        </p:nvSpPr>
+        <p:spPr>
+          <a:xfrm>
+            <a:off x="3483693" y="5127555"/>
+            <a:ext cx="1654940" cy="4016445"/>
+          </a:xfrm>
+          <a:prstGeom prst="rect">
+            <a:avLst/>
+          </a:prstGeom>
+          <a:noFill/>
+          <a:ln>
+            <a:noFill/>
+          </a:ln>
+        </p:spPr>
+        <p:txBody>
+          <a:bodyPr wrap="square" lIns="0" tIns="0" rIns="0" bIns="0" anchor="t" rtlCol="0">
+            <a:spAutoFit/>
+          </a:bodyPr>
+          <a:lstStyle/>
+          <a:p>
+            <a:pPr algn="l" marL="0" indent="0">
+              <a:lnSpc>
+                <a:spcPct val="100000"/>
+              </a:lnSpc>
+              <a:spcBef>
+                <a:spcPts val="0"/>
+              </a:spcBef>
+              <a:spcAft>
+                <a:spcPts val="0"/>
+              </a:spcAft>
+              <a:buNone/>
+            </a:pPr>
+            <a:r>
+              <a:rPr lang="en-US" sz="1268" b="1" i="0" u="none" strike="noStrike" dirty="0">
+                <a:solidFill>
+                  <a:srgbClr val="536782"/>
+                </a:solidFill>
+                <a:latin typeface="Calibri"/>
+                <a:cs typeface="Calibri"/>
+              </a:rPr>
+              <a:t>Clear message</a:t>
+            </a:r>
+            <a:endParaRPr lang="en-US" sz="1268" b="1" i="0" u="none" strike="noStrike" dirty="0">
+              <a:solidFill>
+                <a:srgbClr val="536782"/>
+              </a:solidFill>
+              <a:latin typeface="Calibri"/>
+              <a:cs typeface="Calibri"/>
+            </a:endParaRPr>
+          </a:p>
+        </p:txBody>
+      </p:sp>
+      <p:sp>
+        <p:nvSpPr>
+          <p:cNvPr id="12" name="TextBox 41"/>
+          <p:cNvSpPr txBox="1"/>
+          <p:nvPr/>
+        </p:nvSpPr>
+        <p:spPr>
+          <a:xfrm>
+            <a:off x="3483693" y="5512217"/>
+            <a:ext cx="1654940" cy="3631783"/>
+          </a:xfrm>
+          <a:prstGeom prst="rect">
+            <a:avLst/>
+          </a:prstGeom>
+          <a:noFill/>
+          <a:ln>
+            <a:noFill/>
+          </a:ln>
+        </p:spPr>
+        <p:txBody>
+          <a:bodyPr wrap="square" lIns="0" tIns="0" rIns="0" bIns="0" anchor="t" rtlCol="0">
+            <a:spAutoFit/>
+          </a:bodyPr>
+          <a:lstStyle/>
+          <a:p>
+            <a:pPr algn="l" marL="0" indent="0">
+              <a:lnSpc>
+                <a:spcPct val="100000"/>
+              </a:lnSpc>
+              <a:spcBef>
+                <a:spcPts val="0"/>
+              </a:spcBef>
+              <a:spcAft>
+                <a:spcPts val="0"/>
+              </a:spcAft>
+              <a:buNone/>
+            </a:pPr>
+            <a:r>
+              <a:rPr lang="en-US" sz="1268" b="0" i="0" u="none" strike="noStrike" dirty="0">
+                <a:solidFill>
+                  <a:srgbClr val="536782"/>
+                </a:solidFill>
+                <a:latin typeface="Calibri"/>
+                <a:cs typeface="Calibri"/>
+              </a:rPr>
+              <a:t>Strong visuals</a:t>
+            </a:r>
+            <a:endParaRPr lang="en-US" sz="1268" b="0" i="0" u="none" strike="noStrike" dirty="0">
+              <a:solidFill>
+                <a:srgbClr val="536782"/>
+              </a:solidFill>
+              <a:latin typeface="Calibri"/>
+              <a:cs typeface="Calibri"/>
+            </a:endParaRPr>
+          </a:p>
+        </p:txBody>
+      </p:sp>
+      <p:sp>
+        <p:nvSpPr>
+          <p:cNvPr id="13" name="TextBox 42"/>
+          <p:cNvSpPr txBox="1"/>
+          <p:nvPr/>
+        </p:nvSpPr>
+        <p:spPr>
+          <a:xfrm>
+            <a:off x="3483693" y="5896879"/>
+            <a:ext cx="1654940" cy="3247121"/>
+          </a:xfrm>
+          <a:prstGeom prst="rect">
+            <a:avLst/>
+          </a:prstGeom>
+          <a:noFill/>
+          <a:ln>
+            <a:noFill/>
+          </a:ln>
+        </p:spPr>
+        <p:txBody>
+          <a:bodyPr wrap="square" lIns="0" tIns="0" rIns="0" bIns="0" anchor="t" rtlCol="0">
+            <a:spAutoFit/>
+          </a:bodyPr>
+          <a:lstStyle/>
+          <a:p>
+            <a:pPr algn="l" marL="0" indent="0">
+              <a:lnSpc>
+                <a:spcPct val="100000"/>
+              </a:lnSpc>
+              <a:spcBef>
+                <a:spcPts val="0"/>
+              </a:spcBef>
+              <a:spcAft>
+                <a:spcPts val="0"/>
+              </a:spcAft>
+              <a:buNone/>
+            </a:pPr>
+            <a:r>
+              <a:rPr lang="en-US" sz="1268" b="0" i="0" u="none" strike="noStrike" dirty="0">
+                <a:solidFill>
+                  <a:srgbClr val="536782"/>
+                </a:solidFill>
+                <a:latin typeface="Calibri"/>
+                <a:cs typeface="Calibri"/>
+              </a:rPr>
+              <a:t>Your next big idea</a:t>
+            </a:r>
+            <a:endParaRPr lang="en-US" sz="1268" b="0" i="0" u="none" strike="noStrike" dirty="0">
+              <a:solidFill>
+                <a:srgbClr val="536782"/>
+              </a:solidFill>
+              <a:latin typeface="Calibri"/>
+              <a:cs typeface="Calibri"/>
+            </a:endParaRPr>
+          </a:p>
+        </p:txBody>
+      </p:sp>
+      <p:sp>
+        <p:nvSpPr>
+          <p:cNvPr id="14" name="TextBox 43"/>
+          <p:cNvSpPr txBox="1"/>
+          <p:nvPr/>
+        </p:nvSpPr>
+        <p:spPr>
+          <a:xfrm>
+            <a:off x="406400" y="8305800"/>
+            <a:ext cx="4902200" cy="838200"/>
+          </a:xfrm>
+          <a:prstGeom prst="rect">
+            <a:avLst/>
+          </a:prstGeom>
+          <a:noFill/>
+          <a:ln>
+            <a:noFill/>
+          </a:ln>
+        </p:spPr>
+        <p:txBody>
+          <a:bodyPr wrap="square" lIns="0" tIns="0" rIns="0" bIns="0" anchor="t" rtlCol="0">
+            <a:spAutoFit/>
+          </a:bodyPr>
+          <a:lstStyle/>
+          <a:p>
+            <a:pPr algn="l" marL="0" indent="0">
+              <a:lnSpc>
+                <a:spcPct val="100000"/>
+              </a:lnSpc>
+              <a:spcBef>
+                <a:spcPts val="0"/>
+              </a:spcBef>
+              <a:spcAft>
+                <a:spcPts val="0"/>
+              </a:spcAft>
+              <a:buNone/>
+            </a:pPr>
+            <a:r>
+              <a:rPr lang="en-US" sz="1200" b="1" i="0" u="none" strike="noStrike" dirty="0">
+                <a:solidFill>
+                  <a:srgbClr val="C74724"/>
+                </a:solidFill>
+                <a:latin typeface="Calibri"/>
+                <a:cs typeface="Calibri"/>
+              </a:rPr>
+              <a:t>PPTX  ·  THEMES  ·  CHARTS  ·  ANIMATIONS</a:t>
+            </a:r>
+            <a:endParaRPr lang="en-US" sz="1200" b="1" i="0" u="none" strike="noStrike" dirty="0">
+              <a:solidFill>
+                <a:srgbClr val="C74724"/>
+              </a:solidFill>
+              <a:latin typeface="Calibri"/>
+              <a:cs typeface="Calibri"/>
+            </a:endParaRPr>
+          </a:p>
+        </p:txBody>
+      </p:sp>
+    </p:spTree>
+  </p:cSld>
+  <p:clrMapOvr>
+    <a:masterClrMapping/>
+  </p:clrMapOvr>
+  <p:transition spd="fast">
+    <p:fade/>
+  </p:transition>
+</p:sld>
+</file>
+
+<file path=ppt/slides/slide4.xml><?xml version="1.0" encoding="utf-8"?>
+<p:sld xmlns:a="http://schemas.openxmlformats.org/drawingml/2006/main" xmlns:r="http://schemas.openxmlformats.org/officeDocument/2006/relationships" xmlns:p="http://schemas.openxmlformats.org/presentationml/2006/main">
+  <p:cSld>
+    <p:bg>
+      <p:bgPr>
+        <a:solidFill>
+          <a:srgbClr val="EDF9F2"/>
+        </a:solidFill>
+        <a:effectLst/>
+      </p:bgPr>
+    </p:bg>
+    <p:spTree>
+      <p:nvGrpSpPr>
+        <p:cNvPr id="1" name=""/>
+        <p:cNvGrpSpPr/>
+        <p:nvPr/>
+      </p:nvGrpSpPr>
+      <p:grpSpPr>
+        <a:xfrm>
+          <a:off x="0" y="0"/>
+          <a:ext cx="0" cy="0"/>
+          <a:chOff x="0" y="0"/>
+          <a:chExt cx="0" cy="0"/>
+        </a:xfrm>
+      </p:grpSpPr>
+      <p:sp>
+        <p:nvSpPr>
+          <p:cNvPr id="2" name="TextBox 45"/>
+          <p:cNvSpPr txBox="1"/>
+          <p:nvPr/>
+        </p:nvSpPr>
+        <p:spPr>
+          <a:xfrm>
+            <a:off x="406400" y="508000"/>
+            <a:ext cx="4902200" cy="8636000"/>
+          </a:xfrm>
+          <a:prstGeom prst="rect">
+            <a:avLst/>
+          </a:prstGeom>
+          <a:noFill/>
+          <a:ln>
+            <a:noFill/>
+          </a:ln>
+        </p:spPr>
+        <p:txBody>
+          <a:bodyPr wrap="square" lIns="0" tIns="0" rIns="0" bIns="0" anchor="t" rtlCol="0">
+            <a:spAutoFit/>
+          </a:bodyPr>
+          <a:lstStyle/>
+          <a:p>
+            <a:pPr algn="l" marL="0" indent="0">
+              <a:lnSpc>
+                <a:spcPct val="100000"/>
+              </a:lnSpc>
+              <a:spcBef>
+                <a:spcPts val="0"/>
+              </a:spcBef>
+              <a:spcAft>
+                <a:spcPts val="0"/>
+              </a:spcAft>
+              <a:buNone/>
+            </a:pPr>
+            <a:r>
+              <a:rPr lang="en-US" sz="1300" b="1" i="0" u="none" strike="noStrike" dirty="0">
+                <a:solidFill>
+                  <a:srgbClr val="13794D"/>
+                </a:solidFill>
+                <a:latin typeface="Calibri"/>
+                <a:cs typeface="Calibri"/>
+              </a:rPr>
+              <a:t>03  /  MEET SHEETS</a:t>
+            </a:r>
+            <a:endParaRPr lang="en-US" sz="1300" b="1" i="0" u="none" strike="noStrike" dirty="0">
+              <a:solidFill>
+                <a:srgbClr val="13794D"/>
+              </a:solidFill>
+              <a:latin typeface="Calibri"/>
+              <a:cs typeface="Calibri"/>
+            </a:endParaRPr>
+          </a:p>
+        </p:txBody>
+      </p:sp>
+      <p:sp>
+        <p:nvSpPr>
+          <p:cNvPr id="3" name="TextBox 46"/>
+          <p:cNvSpPr txBox="1"/>
+          <p:nvPr/>
+        </p:nvSpPr>
+        <p:spPr>
+          <a:xfrm>
+            <a:off x="406400" y="1193800"/>
+            <a:ext cx="5080000" cy="7950200"/>
+          </a:xfrm>
+          <a:prstGeom prst="rect">
+            <a:avLst/>
+          </a:prstGeom>
+          <a:noFill/>
+          <a:ln>
+            <a:noFill/>
+          </a:ln>
+        </p:spPr>
+        <p:txBody>
+          <a:bodyPr wrap="square" lIns="0" tIns="0" rIns="0" bIns="0" anchor="t" rtlCol="0">
+            <a:spAutoFit/>
+          </a:bodyPr>
+          <a:lstStyle/>
+          <a:p>
+            <a:pPr algn="l" marL="0" indent="0">
+              <a:lnSpc>
+                <a:spcPct val="100000"/>
+              </a:lnSpc>
+              <a:spcBef>
+                <a:spcPts val="0"/>
+              </a:spcBef>
+              <a:spcAft>
+                <a:spcPts val="0"/>
+              </a:spcAft>
+              <a:buNone/>
+            </a:pPr>
+            <a:r>
+              <a:rPr lang="en-US" sz="4800" b="1" i="0" u="none" strike="noStrike" dirty="0">
+                <a:solidFill>
+                  <a:srgbClr val="132442"/>
+                </a:solidFill>
+                <a:latin typeface="Calibri"/>
+                <a:cs typeface="Calibri"/>
+              </a:rPr>
+              <a:t>Let the numbers</a:t>
+            </a:r>
+            <a:endParaRPr lang="en-US" sz="4800" b="1" i="0" u="none" strike="noStrike" dirty="0">
+              <a:solidFill>
+                <a:srgbClr val="132442"/>
+              </a:solidFill>
+              <a:latin typeface="Calibri"/>
+              <a:cs typeface="Calibri"/>
+            </a:endParaRPr>
+          </a:p>
+          <a:p>
+            <a:pPr algn="l" marL="0" indent="0">
+              <a:lnSpc>
+                <a:spcPct val="100000"/>
+              </a:lnSpc>
+              <a:spcBef>
+                <a:spcPts val="0"/>
+              </a:spcBef>
+              <a:spcAft>
+                <a:spcPts val="0"/>
+              </a:spcAft>
+              <a:buNone/>
+            </a:pPr>
+            <a:r>
+              <a:rPr lang="en-US" sz="4800" b="1" i="0" u="none" strike="noStrike" dirty="0">
+                <a:solidFill>
+                  <a:srgbClr val="132442"/>
+                </a:solidFill>
+                <a:latin typeface="Calibri"/>
+                <a:cs typeface="Calibri"/>
+              </a:rPr>
+              <a:t>tell the story.</a:t>
+            </a:r>
+            <a:endParaRPr lang="en-US" sz="4800" b="1" i="0" u="none" strike="noStrike" dirty="0">
+              <a:solidFill>
+                <a:srgbClr val="132442"/>
+              </a:solidFill>
+              <a:latin typeface="Calibri"/>
+              <a:cs typeface="Calibri"/>
+            </a:endParaRPr>
+          </a:p>
+        </p:txBody>
+      </p:sp>
+      <p:sp>
+        <p:nvSpPr>
+          <p:cNvPr id="4" name="TextBox 47"/>
+          <p:cNvSpPr txBox="1"/>
+          <p:nvPr/>
+        </p:nvSpPr>
+        <p:spPr>
+          <a:xfrm>
+            <a:off x="406400" y="7239000"/>
+            <a:ext cx="4953000" cy="1905000"/>
+          </a:xfrm>
+          <a:prstGeom prst="rect">
+            <a:avLst/>
+          </a:prstGeom>
+          <a:noFill/>
+          <a:ln>
+            <a:noFill/>
+          </a:ln>
+        </p:spPr>
+        <p:txBody>
+          <a:bodyPr wrap="square" lIns="0" tIns="0" rIns="0" bIns="0" anchor="t" rtlCol="0">
+            <a:spAutoFit/>
+          </a:bodyPr>
+          <a:lstStyle/>
+          <a:p>
+            <a:pPr algn="l" marL="0" indent="0">
+              <a:lnSpc>
+                <a:spcPct val="100000"/>
+              </a:lnSpc>
+              <a:spcBef>
+                <a:spcPts val="0"/>
+              </a:spcBef>
+              <a:spcAft>
+                <a:spcPts val="0"/>
+              </a:spcAft>
+              <a:buNone/>
+            </a:pPr>
+            <a:r>
+              <a:rPr lang="en-US" sz="2200" b="0" i="0" u="none" strike="noStrike" dirty="0">
+                <a:solidFill>
+                  <a:srgbClr val="536782"/>
+                </a:solidFill>
+                <a:latin typeface="Calibri"/>
+                <a:cs typeface="Calibri"/>
+              </a:rPr>
+              <a:t>Organize your data.</a:t>
+            </a:r>
+            <a:endParaRPr lang="en-US" sz="2200" b="0" i="0" u="none" strike="noStrike" dirty="0">
+              <a:solidFill>
+                <a:srgbClr val="536782"/>
+              </a:solidFill>
+              <a:latin typeface="Calibri"/>
+              <a:cs typeface="Calibri"/>
+            </a:endParaRPr>
+          </a:p>
+          <a:p>
+            <a:pPr algn="l" marL="0" indent="0">
+              <a:lnSpc>
+                <a:spcPct val="100000"/>
+              </a:lnSpc>
+              <a:spcBef>
+                <a:spcPts val="0"/>
+              </a:spcBef>
+              <a:spcAft>
+                <a:spcPts val="0"/>
+              </a:spcAft>
+              <a:buNone/>
+            </a:pPr>
+            <a:r>
+              <a:rPr lang="en-US" sz="2200" b="0" i="0" u="none" strike="noStrike" dirty="0">
+                <a:solidFill>
+                  <a:srgbClr val="536782"/>
+                </a:solidFill>
+                <a:latin typeface="Calibri"/>
+                <a:cs typeface="Calibri"/>
+              </a:rPr>
+              <a:t>Turn formulas into answers.</a:t>
+            </a:r>
+            <a:endParaRPr lang="en-US" sz="2200" b="0" i="0" u="none" strike="noStrike" dirty="0">
+              <a:solidFill>
+                <a:srgbClr val="536782"/>
+              </a:solidFill>
+              <a:latin typeface="Calibri"/>
+              <a:cs typeface="Calibri"/>
+            </a:endParaRPr>
+          </a:p>
+        </p:txBody>
+      </p:sp>
+      <p:sp>
+        <p:nvSpPr>
+          <p:cNvPr id="5" name="Rounded Rectangle 48"/>
+          <p:cNvSpPr/>
+          <p:nvPr/>
+        </p:nvSpPr>
+        <p:spPr>
+          <a:xfrm>
+            <a:off x="406400" y="3632200"/>
+            <a:ext cx="4902200" cy="3097058"/>
+          </a:xfrm>
+          <a:prstGeom prst="roundRect">
+            <a:avLst/>
+          </a:prstGeom>
+          <a:solidFill>
+            <a:srgbClr val="FFFFFF"/>
+          </a:solidFill>
+          <a:ln>
+            <a:noFill/>
+          </a:ln>
+        </p:spPr>
+        <p:txBody>
+          <a:bodyPr wrap="square" lIns="91440" tIns="45720" rIns="91440" bIns="45720" anchor="ctr" rtlCol="0">
+            <a:noAutofit/>
+          </a:bodyPr>
+          <a:lstStyle/>
+          <a:p>
+            <a:pPr algn="ctr" marL="0" indent="0">
+              <a:lnSpc>
+                <a:spcPct val="100000"/>
+              </a:lnSpc>
+              <a:spcBef>
+                <a:spcPts val="0"/>
+              </a:spcBef>
+              <a:spcAft>
+                <a:spcPts val="0"/>
+              </a:spcAft>
+              <a:buNone/>
+            </a:pPr>
+            <a:endParaRPr lang="en-US" sz="1800" b="0" i="0" u="none" strike="noStrike" dirty="0">
+              <a:solidFill>
+                <a:srgbClr val="FFFFFF"/>
+              </a:solidFill>
+              <a:latin typeface="Calibri"/>
+              <a:cs typeface="Calibri"/>
+            </a:endParaRPr>
+          </a:p>
+        </p:txBody>
+      </p:sp>
+      <p:sp>
+        <p:nvSpPr>
+          <p:cNvPr id="6" name="Rounded Rectangle 49"/>
+          <p:cNvSpPr/>
+          <p:nvPr/>
+        </p:nvSpPr>
+        <p:spPr>
+          <a:xfrm>
+            <a:off x="547980" y="3773780"/>
+            <a:ext cx="4619040" cy="407042"/>
+          </a:xfrm>
+          <a:prstGeom prst="roundRect">
+            <a:avLst/>
+          </a:prstGeom>
+          <a:solidFill>
+            <a:srgbClr val="E3F3E9"/>
+          </a:solidFill>
+          <a:ln>
+            <a:noFill/>
+          </a:ln>
+        </p:spPr>
+        <p:txBody>
+          <a:bodyPr wrap="square" lIns="91440" tIns="45720" rIns="91440" bIns="45720" anchor="ctr" rtlCol="0">
+            <a:noAutofit/>
+          </a:bodyPr>
+          <a:lstStyle/>
+          <a:p>
+            <a:pPr algn="ctr" marL="0" indent="0">
+              <a:lnSpc>
+                <a:spcPct val="100000"/>
+              </a:lnSpc>
+              <a:spcBef>
+                <a:spcPts val="0"/>
+              </a:spcBef>
+              <a:spcAft>
+                <a:spcPts val="0"/>
+              </a:spcAft>
+              <a:buNone/>
+            </a:pPr>
+            <a:endParaRPr lang="en-US" sz="1800" b="0" i="0" u="none" strike="noStrike" dirty="0">
+              <a:solidFill>
+                <a:srgbClr val="FFFFFF"/>
+              </a:solidFill>
+              <a:latin typeface="Calibri"/>
+              <a:cs typeface="Calibri"/>
+            </a:endParaRPr>
+          </a:p>
+        </p:txBody>
+      </p:sp>
+      <p:sp>
+        <p:nvSpPr>
+          <p:cNvPr id="7" name="TextBox 50"/>
+          <p:cNvSpPr txBox="1"/>
+          <p:nvPr/>
+        </p:nvSpPr>
+        <p:spPr>
+          <a:xfrm>
+            <a:off x="689560" y="3844570"/>
+            <a:ext cx="4335881" cy="5299430"/>
+          </a:xfrm>
+          <a:prstGeom prst="rect">
+            <a:avLst/>
+          </a:prstGeom>
+          <a:noFill/>
+          <a:ln>
+            <a:noFill/>
+          </a:ln>
+        </p:spPr>
+        <p:txBody>
+          <a:bodyPr wrap="square" lIns="0" tIns="0" rIns="0" bIns="0" anchor="t" rtlCol="0">
+            <a:spAutoFit/>
+          </a:bodyPr>
+          <a:lstStyle/>
+          <a:p>
+            <a:pPr algn="l" marL="0" indent="0">
+              <a:lnSpc>
+                <a:spcPct val="100000"/>
+              </a:lnSpc>
+              <a:spcBef>
+                <a:spcPts val="0"/>
+              </a:spcBef>
+              <a:spcAft>
+                <a:spcPts val="0"/>
+              </a:spcAft>
+              <a:buNone/>
+            </a:pPr>
+            <a:r>
+              <a:rPr lang="en-US" sz="1533" b="0" i="0" u="none" strike="noStrike" dirty="0">
+                <a:solidFill>
+                  <a:srgbClr val="13794D"/>
+                </a:solidFill>
+                <a:latin typeface="Calibri"/>
+                <a:cs typeface="Calibri"/>
+              </a:rPr>
+              <a:t>fx    =SUM(C2:C4)</a:t>
+            </a:r>
+            <a:endParaRPr lang="en-US" sz="1533" b="0" i="0" u="none" strike="noStrike" dirty="0">
+              <a:solidFill>
+                <a:srgbClr val="13794D"/>
+              </a:solidFill>
+              <a:latin typeface="Calibri"/>
+              <a:cs typeface="Calibri"/>
+            </a:endParaRPr>
+          </a:p>
+        </p:txBody>
+      </p:sp>
+      <p:sp>
+        <p:nvSpPr>
+          <p:cNvPr id="8" name="Rectangle 51"/>
+          <p:cNvSpPr/>
+          <p:nvPr/>
+        </p:nvSpPr>
+        <p:spPr>
+          <a:xfrm>
+            <a:off x="547980" y="4357796"/>
+            <a:ext cx="4619040" cy="424739"/>
+          </a:xfrm>
+          <a:prstGeom prst="rect">
+            <a:avLst/>
+          </a:prstGeom>
+          <a:solidFill>
+            <a:srgbClr val="E3F3E9"/>
+          </a:solidFill>
+          <a:ln>
+            <a:noFill/>
+          </a:ln>
+        </p:spPr>
+        <p:txBody>
+          <a:bodyPr wrap="square" lIns="91440" tIns="45720" rIns="91440" bIns="45720" anchor="ctr" rtlCol="0">
+            <a:noAutofit/>
+          </a:bodyPr>
+          <a:lstStyle/>
+          <a:p>
+            <a:pPr algn="ctr" marL="0" indent="0">
+              <a:lnSpc>
+                <a:spcPct val="100000"/>
+              </a:lnSpc>
+              <a:spcBef>
+                <a:spcPts val="0"/>
+              </a:spcBef>
+              <a:spcAft>
+                <a:spcPts val="0"/>
+              </a:spcAft>
+              <a:buNone/>
+            </a:pPr>
+            <a:endParaRPr lang="en-US" sz="1800" b="0" i="0" u="none" strike="noStrike" dirty="0">
+              <a:solidFill>
+                <a:srgbClr val="FFFFFF"/>
+              </a:solidFill>
+              <a:latin typeface="Calibri"/>
+              <a:cs typeface="Calibri"/>
+            </a:endParaRPr>
+          </a:p>
+        </p:txBody>
+      </p:sp>
+      <p:sp>
+        <p:nvSpPr>
+          <p:cNvPr id="9" name="TextBox 52"/>
+          <p:cNvSpPr txBox="1"/>
+          <p:nvPr/>
+        </p:nvSpPr>
+        <p:spPr>
+          <a:xfrm>
+            <a:off x="689560" y="4428586"/>
+            <a:ext cx="1468890" cy="4715414"/>
+          </a:xfrm>
+          <a:prstGeom prst="rect">
+            <a:avLst/>
+          </a:prstGeom>
+          <a:noFill/>
+          <a:ln>
+            <a:noFill/>
+          </a:ln>
+        </p:spPr>
+        <p:txBody>
+          <a:bodyPr wrap="square" lIns="0" tIns="0" rIns="0" bIns="0" anchor="t" rtlCol="0">
+            <a:spAutoFit/>
+          </a:bodyPr>
+          <a:lstStyle/>
+          <a:p>
+            <a:pPr algn="l" marL="0" indent="0">
+              <a:lnSpc>
+                <a:spcPct val="100000"/>
+              </a:lnSpc>
+              <a:spcBef>
+                <a:spcPts val="0"/>
+              </a:spcBef>
+              <a:spcAft>
+                <a:spcPts val="0"/>
+              </a:spcAft>
+              <a:buNone/>
+            </a:pPr>
+            <a:r>
+              <a:rPr lang="en-US" sz="1533" b="1" i="0" u="none" strike="noStrike" dirty="0">
+                <a:solidFill>
+                  <a:srgbClr val="132442"/>
+                </a:solidFill>
+                <a:latin typeface="Calibri"/>
+                <a:cs typeface="Calibri"/>
+              </a:rPr>
+              <a:t>Project</a:t>
+            </a:r>
+            <a:endParaRPr lang="en-US" sz="1533" b="1" i="0" u="none" strike="noStrike" dirty="0">
+              <a:solidFill>
+                <a:srgbClr val="132442"/>
+              </a:solidFill>
+              <a:latin typeface="Calibri"/>
+              <a:cs typeface="Calibri"/>
+            </a:endParaRPr>
+          </a:p>
+        </p:txBody>
+      </p:sp>
+      <p:sp>
+        <p:nvSpPr>
+          <p:cNvPr id="10" name="TextBox 53"/>
+          <p:cNvSpPr txBox="1"/>
+          <p:nvPr/>
+        </p:nvSpPr>
+        <p:spPr>
+          <a:xfrm>
+            <a:off x="2229240" y="4428586"/>
+            <a:ext cx="1468890" cy="4715414"/>
+          </a:xfrm>
+          <a:prstGeom prst="rect">
+            <a:avLst/>
+          </a:prstGeom>
+          <a:noFill/>
+          <a:ln>
+            <a:noFill/>
+          </a:ln>
+        </p:spPr>
+        <p:txBody>
+          <a:bodyPr wrap="square" lIns="0" tIns="0" rIns="0" bIns="0" anchor="t" rtlCol="0">
+            <a:spAutoFit/>
+          </a:bodyPr>
+          <a:lstStyle/>
+          <a:p>
+            <a:pPr algn="l" marL="0" indent="0">
+              <a:lnSpc>
+                <a:spcPct val="100000"/>
+              </a:lnSpc>
+              <a:spcBef>
+                <a:spcPts val="0"/>
+              </a:spcBef>
+              <a:spcAft>
+                <a:spcPts val="0"/>
+              </a:spcAft>
+              <a:buNone/>
+            </a:pPr>
+            <a:r>
+              <a:rPr lang="en-US" sz="1533" b="1" i="0" u="none" strike="noStrike" dirty="0">
+                <a:solidFill>
+                  <a:srgbClr val="132442"/>
+                </a:solidFill>
+                <a:latin typeface="Calibri"/>
+                <a:cs typeface="Calibri"/>
+              </a:rPr>
+              <a:t>Budget</a:t>
+            </a:r>
+            <a:endParaRPr lang="en-US" sz="1533" b="1" i="0" u="none" strike="noStrike" dirty="0">
+              <a:solidFill>
+                <a:srgbClr val="132442"/>
+              </a:solidFill>
+              <a:latin typeface="Calibri"/>
+              <a:cs typeface="Calibri"/>
+            </a:endParaRPr>
+          </a:p>
+        </p:txBody>
+      </p:sp>
+      <p:sp>
+        <p:nvSpPr>
+          <p:cNvPr id="11" name="TextBox 54"/>
+          <p:cNvSpPr txBox="1"/>
+          <p:nvPr/>
+        </p:nvSpPr>
+        <p:spPr>
+          <a:xfrm>
+            <a:off x="3768920" y="4428586"/>
+            <a:ext cx="1468890" cy="4715414"/>
+          </a:xfrm>
+          <a:prstGeom prst="rect">
+            <a:avLst/>
+          </a:prstGeom>
+          <a:noFill/>
+          <a:ln>
+            <a:noFill/>
+          </a:ln>
+        </p:spPr>
+        <p:txBody>
+          <a:bodyPr wrap="square" lIns="0" tIns="0" rIns="0" bIns="0" anchor="t" rtlCol="0">
+            <a:spAutoFit/>
+          </a:bodyPr>
+          <a:lstStyle/>
+          <a:p>
+            <a:pPr algn="l" marL="0" indent="0">
+              <a:lnSpc>
+                <a:spcPct val="100000"/>
+              </a:lnSpc>
+              <a:spcBef>
+                <a:spcPts val="0"/>
+              </a:spcBef>
+              <a:spcAft>
+                <a:spcPts val="0"/>
+              </a:spcAft>
+              <a:buNone/>
+            </a:pPr>
+            <a:r>
+              <a:rPr lang="en-US" sz="1533" b="1" i="0" u="none" strike="noStrike" dirty="0">
+                <a:solidFill>
+                  <a:srgbClr val="132442"/>
+                </a:solidFill>
+                <a:latin typeface="Calibri"/>
+                <a:cs typeface="Calibri"/>
+              </a:rPr>
+              <a:t>Actual</a:t>
+            </a:r>
+            <a:endParaRPr lang="en-US" sz="1533" b="1" i="0" u="none" strike="noStrike" dirty="0">
+              <a:solidFill>
+                <a:srgbClr val="132442"/>
+              </a:solidFill>
+              <a:latin typeface="Calibri"/>
+              <a:cs typeface="Calibri"/>
+            </a:endParaRPr>
+          </a:p>
+        </p:txBody>
+      </p:sp>
+      <p:sp>
+        <p:nvSpPr>
+          <p:cNvPr id="12" name="Rectangle 55"/>
+          <p:cNvSpPr/>
+          <p:nvPr/>
+        </p:nvSpPr>
+        <p:spPr>
+          <a:xfrm>
+            <a:off x="547980" y="4791384"/>
+            <a:ext cx="4619040" cy="424739"/>
+          </a:xfrm>
+          <a:prstGeom prst="rect">
+            <a:avLst/>
+          </a:prstGeom>
+          <a:solidFill>
+            <a:srgbClr val="F6FAF7"/>
+          </a:solidFill>
+          <a:ln>
+            <a:noFill/>
+          </a:ln>
+        </p:spPr>
+        <p:txBody>
+          <a:bodyPr wrap="square" lIns="91440" tIns="45720" rIns="91440" bIns="45720" anchor="ctr" rtlCol="0">
+            <a:noAutofit/>
+          </a:bodyPr>
+          <a:lstStyle/>
+          <a:p>
+            <a:pPr algn="ctr" marL="0" indent="0">
+              <a:lnSpc>
+                <a:spcPct val="100000"/>
+              </a:lnSpc>
+              <a:spcBef>
+                <a:spcPts val="0"/>
+              </a:spcBef>
+              <a:spcAft>
+                <a:spcPts val="0"/>
+              </a:spcAft>
+              <a:buNone/>
+            </a:pPr>
+            <a:endParaRPr lang="en-US" sz="1800" b="0" i="0" u="none" strike="noStrike" dirty="0">
+              <a:solidFill>
+                <a:srgbClr val="FFFFFF"/>
+              </a:solidFill>
+              <a:latin typeface="Calibri"/>
+              <a:cs typeface="Calibri"/>
+            </a:endParaRPr>
+          </a:p>
+        </p:txBody>
+      </p:sp>
+      <p:sp>
+        <p:nvSpPr>
+          <p:cNvPr id="13" name="TextBox 56"/>
+          <p:cNvSpPr txBox="1"/>
+          <p:nvPr/>
+        </p:nvSpPr>
+        <p:spPr>
+          <a:xfrm>
+            <a:off x="689560" y="4862174"/>
+            <a:ext cx="1468890" cy="4281826"/>
+          </a:xfrm>
+          <a:prstGeom prst="rect">
+            <a:avLst/>
+          </a:prstGeom>
+          <a:noFill/>
+          <a:ln>
+            <a:noFill/>
+          </a:ln>
+        </p:spPr>
+        <p:txBody>
+          <a:bodyPr wrap="square" lIns="0" tIns="0" rIns="0" bIns="0" anchor="t" rtlCol="0">
+            <a:spAutoFit/>
+          </a:bodyPr>
+          <a:lstStyle/>
+          <a:p>
+            <a:pPr algn="l" marL="0" indent="0">
+              <a:lnSpc>
+                <a:spcPct val="100000"/>
+              </a:lnSpc>
+              <a:spcBef>
+                <a:spcPts val="0"/>
+              </a:spcBef>
+              <a:spcAft>
+                <a:spcPts val="0"/>
+              </a:spcAft>
+              <a:buNone/>
+            </a:pPr>
+            <a:r>
+              <a:rPr lang="en-US" sz="1533" b="0" i="0" u="none" strike="noStrike" dirty="0">
+                <a:solidFill>
+                  <a:srgbClr val="132442"/>
+                </a:solidFill>
+                <a:latin typeface="Calibri"/>
+                <a:cs typeface="Calibri"/>
+              </a:rPr>
+              <a:t>Design</a:t>
+            </a:r>
+            <a:endParaRPr lang="en-US" sz="1533" b="0" i="0" u="none" strike="noStrike" dirty="0">
+              <a:solidFill>
+                <a:srgbClr val="132442"/>
+              </a:solidFill>
+              <a:latin typeface="Calibri"/>
+              <a:cs typeface="Calibri"/>
+            </a:endParaRPr>
+          </a:p>
+        </p:txBody>
+      </p:sp>
+      <p:sp>
+        <p:nvSpPr>
+          <p:cNvPr id="14" name="TextBox 57"/>
+          <p:cNvSpPr txBox="1"/>
+          <p:nvPr/>
+        </p:nvSpPr>
+        <p:spPr>
+          <a:xfrm>
+            <a:off x="2229240" y="4862174"/>
+            <a:ext cx="1468890" cy="4281826"/>
+          </a:xfrm>
+          <a:prstGeom prst="rect">
+            <a:avLst/>
+          </a:prstGeom>
+          <a:noFill/>
+          <a:ln>
+            <a:noFill/>
+          </a:ln>
+        </p:spPr>
+        <p:txBody>
+          <a:bodyPr wrap="square" lIns="0" tIns="0" rIns="0" bIns="0" anchor="t" rtlCol="0">
+            <a:spAutoFit/>
+          </a:bodyPr>
+          <a:lstStyle/>
+          <a:p>
+            <a:pPr algn="l" marL="0" indent="0">
+              <a:lnSpc>
+                <a:spcPct val="100000"/>
+              </a:lnSpc>
+              <a:spcBef>
+                <a:spcPts val="0"/>
+              </a:spcBef>
+              <a:spcAft>
+                <a:spcPts val="0"/>
+              </a:spcAft>
+              <a:buNone/>
+            </a:pPr>
+            <a:r>
+              <a:rPr lang="en-US" sz="1533" b="0" i="0" u="none" strike="noStrike" dirty="0">
+                <a:solidFill>
+                  <a:srgbClr val="132442"/>
+                </a:solidFill>
+                <a:latin typeface="Calibri"/>
+                <a:cs typeface="Calibri"/>
+              </a:rPr>
+              <a:t>2,400</a:t>
+            </a:r>
+            <a:endParaRPr lang="en-US" sz="1533" b="0" i="0" u="none" strike="noStrike" dirty="0">
+              <a:solidFill>
+                <a:srgbClr val="132442"/>
+              </a:solidFill>
+              <a:latin typeface="Calibri"/>
+              <a:cs typeface="Calibri"/>
+            </a:endParaRPr>
+          </a:p>
+        </p:txBody>
+      </p:sp>
+      <p:sp>
+        <p:nvSpPr>
+          <p:cNvPr id="15" name="TextBox 58"/>
+          <p:cNvSpPr txBox="1"/>
+          <p:nvPr/>
+        </p:nvSpPr>
+        <p:spPr>
+          <a:xfrm>
+            <a:off x="3768920" y="4862174"/>
+            <a:ext cx="1468890" cy="4281826"/>
+          </a:xfrm>
+          <a:prstGeom prst="rect">
+            <a:avLst/>
+          </a:prstGeom>
+          <a:noFill/>
+          <a:ln>
+            <a:noFill/>
+          </a:ln>
+        </p:spPr>
+        <p:txBody>
+          <a:bodyPr wrap="square" lIns="0" tIns="0" rIns="0" bIns="0" anchor="t" rtlCol="0">
+            <a:spAutoFit/>
+          </a:bodyPr>
+          <a:lstStyle/>
+          <a:p>
+            <a:pPr algn="l" marL="0" indent="0">
+              <a:lnSpc>
+                <a:spcPct val="100000"/>
+              </a:lnSpc>
+              <a:spcBef>
+                <a:spcPts val="0"/>
+              </a:spcBef>
+              <a:spcAft>
+                <a:spcPts val="0"/>
+              </a:spcAft>
+              <a:buNone/>
+            </a:pPr>
+            <a:r>
+              <a:rPr lang="en-US" sz="1533" b="0" i="0" u="none" strike="noStrike" dirty="0">
+                <a:solidFill>
+                  <a:srgbClr val="132442"/>
+                </a:solidFill>
+                <a:latin typeface="Calibri"/>
+                <a:cs typeface="Calibri"/>
+              </a:rPr>
+              <a:t>2,100</a:t>
+            </a:r>
+            <a:endParaRPr lang="en-US" sz="1533" b="0" i="0" u="none" strike="noStrike" dirty="0">
+              <a:solidFill>
+                <a:srgbClr val="132442"/>
+              </a:solidFill>
+              <a:latin typeface="Calibri"/>
+              <a:cs typeface="Calibri"/>
+            </a:endParaRPr>
+          </a:p>
+        </p:txBody>
+      </p:sp>
+      <p:sp>
+        <p:nvSpPr>
+          <p:cNvPr id="16" name="Rectangle 59"/>
+          <p:cNvSpPr/>
+          <p:nvPr/>
+        </p:nvSpPr>
+        <p:spPr>
+          <a:xfrm>
+            <a:off x="547980" y="5224973"/>
+            <a:ext cx="4619040" cy="424739"/>
+          </a:xfrm>
+          <a:prstGeom prst="rect">
+            <a:avLst/>
+          </a:prstGeom>
+          <a:solidFill>
+            <a:srgbClr val="F6FAF7"/>
+          </a:solidFill>
+          <a:ln>
+            <a:noFill/>
+          </a:ln>
+        </p:spPr>
+        <p:txBody>
+          <a:bodyPr wrap="square" lIns="91440" tIns="45720" rIns="91440" bIns="45720" anchor="ctr" rtlCol="0">
+            <a:noAutofit/>
+          </a:bodyPr>
+          <a:lstStyle/>
+          <a:p>
+            <a:pPr algn="ctr" marL="0" indent="0">
+              <a:lnSpc>
+                <a:spcPct val="100000"/>
+              </a:lnSpc>
+              <a:spcBef>
+                <a:spcPts val="0"/>
+              </a:spcBef>
+              <a:spcAft>
+                <a:spcPts val="0"/>
+              </a:spcAft>
+              <a:buNone/>
+            </a:pPr>
+            <a:endParaRPr lang="en-US" sz="1800" b="0" i="0" u="none" strike="noStrike" dirty="0">
+              <a:solidFill>
+                <a:srgbClr val="FFFFFF"/>
+              </a:solidFill>
+              <a:latin typeface="Calibri"/>
+              <a:cs typeface="Calibri"/>
+            </a:endParaRPr>
+          </a:p>
+        </p:txBody>
+      </p:sp>
+      <p:sp>
+        <p:nvSpPr>
+          <p:cNvPr id="17" name="TextBox 60"/>
+          <p:cNvSpPr txBox="1"/>
+          <p:nvPr/>
+        </p:nvSpPr>
+        <p:spPr>
+          <a:xfrm>
+            <a:off x="689560" y="5295762"/>
+            <a:ext cx="1468890" cy="3848238"/>
+          </a:xfrm>
+          <a:prstGeom prst="rect">
+            <a:avLst/>
+          </a:prstGeom>
+          <a:noFill/>
+          <a:ln>
+            <a:noFill/>
+          </a:ln>
+        </p:spPr>
+        <p:txBody>
+          <a:bodyPr wrap="square" lIns="0" tIns="0" rIns="0" bIns="0" anchor="t" rtlCol="0">
+            <a:spAutoFit/>
+          </a:bodyPr>
+          <a:lstStyle/>
+          <a:p>
+            <a:pPr algn="l" marL="0" indent="0">
+              <a:lnSpc>
+                <a:spcPct val="100000"/>
+              </a:lnSpc>
+              <a:spcBef>
+                <a:spcPts val="0"/>
+              </a:spcBef>
+              <a:spcAft>
+                <a:spcPts val="0"/>
+              </a:spcAft>
+              <a:buNone/>
+            </a:pPr>
+            <a:r>
+              <a:rPr lang="en-US" sz="1533" b="0" i="0" u="none" strike="noStrike" dirty="0">
+                <a:solidFill>
+                  <a:srgbClr val="132442"/>
+                </a:solidFill>
+                <a:latin typeface="Calibri"/>
+                <a:cs typeface="Calibri"/>
+              </a:rPr>
+              <a:t>Build</a:t>
+            </a:r>
+            <a:endParaRPr lang="en-US" sz="1533" b="0" i="0" u="none" strike="noStrike" dirty="0">
+              <a:solidFill>
+                <a:srgbClr val="132442"/>
+              </a:solidFill>
+              <a:latin typeface="Calibri"/>
+              <a:cs typeface="Calibri"/>
+            </a:endParaRPr>
+          </a:p>
+        </p:txBody>
+      </p:sp>
+      <p:sp>
+        <p:nvSpPr>
+          <p:cNvPr id="18" name="TextBox 61"/>
+          <p:cNvSpPr txBox="1"/>
+          <p:nvPr/>
+        </p:nvSpPr>
+        <p:spPr>
+          <a:xfrm>
+            <a:off x="2229240" y="5295762"/>
+            <a:ext cx="1468890" cy="3848238"/>
+          </a:xfrm>
+          <a:prstGeom prst="rect">
+            <a:avLst/>
+          </a:prstGeom>
+          <a:noFill/>
+          <a:ln>
+            <a:noFill/>
+          </a:ln>
+        </p:spPr>
+        <p:txBody>
+          <a:bodyPr wrap="square" lIns="0" tIns="0" rIns="0" bIns="0" anchor="t" rtlCol="0">
+            <a:spAutoFit/>
+          </a:bodyPr>
+          <a:lstStyle/>
+          <a:p>
+            <a:pPr algn="l" marL="0" indent="0">
+              <a:lnSpc>
+                <a:spcPct val="100000"/>
+              </a:lnSpc>
+              <a:spcBef>
+                <a:spcPts val="0"/>
+              </a:spcBef>
+              <a:spcAft>
+                <a:spcPts val="0"/>
+              </a:spcAft>
+              <a:buNone/>
+            </a:pPr>
+            <a:r>
+              <a:rPr lang="en-US" sz="1533" b="0" i="0" u="none" strike="noStrike" dirty="0">
+                <a:solidFill>
+                  <a:srgbClr val="132442"/>
+                </a:solidFill>
+                <a:latin typeface="Calibri"/>
+                <a:cs typeface="Calibri"/>
+              </a:rPr>
+              <a:t>6,800</a:t>
+            </a:r>
+            <a:endParaRPr lang="en-US" sz="1533" b="0" i="0" u="none" strike="noStrike" dirty="0">
+              <a:solidFill>
+                <a:srgbClr val="132442"/>
+              </a:solidFill>
+              <a:latin typeface="Calibri"/>
+              <a:cs typeface="Calibri"/>
+            </a:endParaRPr>
+          </a:p>
+        </p:txBody>
+      </p:sp>
+      <p:sp>
+        <p:nvSpPr>
+          <p:cNvPr id="19" name="TextBox 62"/>
+          <p:cNvSpPr txBox="1"/>
+          <p:nvPr/>
+        </p:nvSpPr>
+        <p:spPr>
+          <a:xfrm>
+            <a:off x="3768920" y="5295762"/>
+            <a:ext cx="1468890" cy="3848238"/>
+          </a:xfrm>
+          <a:prstGeom prst="rect">
+            <a:avLst/>
+          </a:prstGeom>
+          <a:noFill/>
+          <a:ln>
+            <a:noFill/>
+          </a:ln>
+        </p:spPr>
+        <p:txBody>
+          <a:bodyPr wrap="square" lIns="0" tIns="0" rIns="0" bIns="0" anchor="t" rtlCol="0">
+            <a:spAutoFit/>
+          </a:bodyPr>
+          <a:lstStyle/>
+          <a:p>
+            <a:pPr algn="l" marL="0" indent="0">
+              <a:lnSpc>
+                <a:spcPct val="100000"/>
+              </a:lnSpc>
+              <a:spcBef>
+                <a:spcPts val="0"/>
+              </a:spcBef>
+              <a:spcAft>
+                <a:spcPts val="0"/>
+              </a:spcAft>
+              <a:buNone/>
+            </a:pPr>
+            <a:r>
+              <a:rPr lang="en-US" sz="1533" b="0" i="0" u="none" strike="noStrike" dirty="0">
+                <a:solidFill>
+                  <a:srgbClr val="132442"/>
+                </a:solidFill>
+                <a:latin typeface="Calibri"/>
+                <a:cs typeface="Calibri"/>
+              </a:rPr>
+              <a:t>6,500</a:t>
+            </a:r>
+            <a:endParaRPr lang="en-US" sz="1533" b="0" i="0" u="none" strike="noStrike" dirty="0">
+              <a:solidFill>
+                <a:srgbClr val="132442"/>
+              </a:solidFill>
+              <a:latin typeface="Calibri"/>
+              <a:cs typeface="Calibri"/>
+            </a:endParaRPr>
+          </a:p>
+        </p:txBody>
+      </p:sp>
+      <p:sp>
+        <p:nvSpPr>
+          <p:cNvPr id="20" name="Rectangle 63"/>
+          <p:cNvSpPr/>
+          <p:nvPr/>
+        </p:nvSpPr>
+        <p:spPr>
+          <a:xfrm>
+            <a:off x="547980" y="5658561"/>
+            <a:ext cx="4619040" cy="424739"/>
+          </a:xfrm>
+          <a:prstGeom prst="rect">
+            <a:avLst/>
+          </a:prstGeom>
+          <a:solidFill>
+            <a:srgbClr val="F6FAF7"/>
+          </a:solidFill>
+          <a:ln>
+            <a:noFill/>
+          </a:ln>
+        </p:spPr>
+        <p:txBody>
+          <a:bodyPr wrap="square" lIns="91440" tIns="45720" rIns="91440" bIns="45720" anchor="ctr" rtlCol="0">
+            <a:noAutofit/>
+          </a:bodyPr>
+          <a:lstStyle/>
+          <a:p>
+            <a:pPr algn="ctr" marL="0" indent="0">
+              <a:lnSpc>
+                <a:spcPct val="100000"/>
+              </a:lnSpc>
+              <a:spcBef>
+                <a:spcPts val="0"/>
+              </a:spcBef>
+              <a:spcAft>
+                <a:spcPts val="0"/>
+              </a:spcAft>
+              <a:buNone/>
+            </a:pPr>
+            <a:endParaRPr lang="en-US" sz="1800" b="0" i="0" u="none" strike="noStrike" dirty="0">
+              <a:solidFill>
+                <a:srgbClr val="FFFFFF"/>
+              </a:solidFill>
+              <a:latin typeface="Calibri"/>
+              <a:cs typeface="Calibri"/>
+            </a:endParaRPr>
+          </a:p>
+        </p:txBody>
+      </p:sp>
+      <p:sp>
+        <p:nvSpPr>
+          <p:cNvPr id="21" name="TextBox 64"/>
+          <p:cNvSpPr txBox="1"/>
+          <p:nvPr/>
+        </p:nvSpPr>
+        <p:spPr>
+          <a:xfrm>
+            <a:off x="689560" y="5729351"/>
+            <a:ext cx="1468890" cy="3414649"/>
+          </a:xfrm>
+          <a:prstGeom prst="rect">
+            <a:avLst/>
+          </a:prstGeom>
+          <a:noFill/>
+          <a:ln>
+            <a:noFill/>
+          </a:ln>
+        </p:spPr>
+        <p:txBody>
+          <a:bodyPr wrap="square" lIns="0" tIns="0" rIns="0" bIns="0" anchor="t" rtlCol="0">
+            <a:spAutoFit/>
+          </a:bodyPr>
+          <a:lstStyle/>
+          <a:p>
+            <a:pPr algn="l" marL="0" indent="0">
+              <a:lnSpc>
+                <a:spcPct val="100000"/>
+              </a:lnSpc>
+              <a:spcBef>
+                <a:spcPts val="0"/>
+              </a:spcBef>
+              <a:spcAft>
+                <a:spcPts val="0"/>
+              </a:spcAft>
+              <a:buNone/>
+            </a:pPr>
+            <a:r>
+              <a:rPr lang="en-US" sz="1533" b="0" i="0" u="none" strike="noStrike" dirty="0">
+                <a:solidFill>
+                  <a:srgbClr val="132442"/>
+                </a:solidFill>
+                <a:latin typeface="Calibri"/>
+                <a:cs typeface="Calibri"/>
+              </a:rPr>
+              <a:t>Launch</a:t>
+            </a:r>
+            <a:endParaRPr lang="en-US" sz="1533" b="0" i="0" u="none" strike="noStrike" dirty="0">
+              <a:solidFill>
+                <a:srgbClr val="132442"/>
+              </a:solidFill>
+              <a:latin typeface="Calibri"/>
+              <a:cs typeface="Calibri"/>
+            </a:endParaRPr>
+          </a:p>
+        </p:txBody>
+      </p:sp>
+      <p:sp>
+        <p:nvSpPr>
+          <p:cNvPr id="22" name="TextBox 65"/>
+          <p:cNvSpPr txBox="1"/>
+          <p:nvPr/>
+        </p:nvSpPr>
+        <p:spPr>
+          <a:xfrm>
+            <a:off x="2229240" y="5729351"/>
+            <a:ext cx="1468890" cy="3414649"/>
+          </a:xfrm>
+          <a:prstGeom prst="rect">
+            <a:avLst/>
+          </a:prstGeom>
+          <a:noFill/>
+          <a:ln>
+            <a:noFill/>
+          </a:ln>
+        </p:spPr>
+        <p:txBody>
+          <a:bodyPr wrap="square" lIns="0" tIns="0" rIns="0" bIns="0" anchor="t" rtlCol="0">
+            <a:spAutoFit/>
+          </a:bodyPr>
+          <a:lstStyle/>
+          <a:p>
+            <a:pPr algn="l" marL="0" indent="0">
+              <a:lnSpc>
+                <a:spcPct val="100000"/>
+              </a:lnSpc>
+              <a:spcBef>
+                <a:spcPts val="0"/>
+              </a:spcBef>
+              <a:spcAft>
+                <a:spcPts val="0"/>
+              </a:spcAft>
+              <a:buNone/>
+            </a:pPr>
+            <a:r>
+              <a:rPr lang="en-US" sz="1533" b="0" i="0" u="none" strike="noStrike" dirty="0">
+                <a:solidFill>
+                  <a:srgbClr val="132442"/>
+                </a:solidFill>
+                <a:latin typeface="Calibri"/>
+                <a:cs typeface="Calibri"/>
+              </a:rPr>
+              <a:t>1,800</a:t>
+            </a:r>
+            <a:endParaRPr lang="en-US" sz="1533" b="0" i="0" u="none" strike="noStrike" dirty="0">
+              <a:solidFill>
+                <a:srgbClr val="132442"/>
+              </a:solidFill>
+              <a:latin typeface="Calibri"/>
+              <a:cs typeface="Calibri"/>
+            </a:endParaRPr>
+          </a:p>
+        </p:txBody>
+      </p:sp>
+      <p:sp>
+        <p:nvSpPr>
+          <p:cNvPr id="23" name="TextBox 66"/>
+          <p:cNvSpPr txBox="1"/>
+          <p:nvPr/>
+        </p:nvSpPr>
+        <p:spPr>
+          <a:xfrm>
+            <a:off x="3768920" y="5729351"/>
+            <a:ext cx="1468890" cy="3414649"/>
+          </a:xfrm>
+          <a:prstGeom prst="rect">
+            <a:avLst/>
+          </a:prstGeom>
+          <a:noFill/>
+          <a:ln>
+            <a:noFill/>
+          </a:ln>
+        </p:spPr>
+        <p:txBody>
+          <a:bodyPr wrap="square" lIns="0" tIns="0" rIns="0" bIns="0" anchor="t" rtlCol="0">
+            <a:spAutoFit/>
+          </a:bodyPr>
+          <a:lstStyle/>
+          <a:p>
+            <a:pPr algn="l" marL="0" indent="0">
+              <a:lnSpc>
+                <a:spcPct val="100000"/>
+              </a:lnSpc>
+              <a:spcBef>
+                <a:spcPts val="0"/>
+              </a:spcBef>
+              <a:spcAft>
+                <a:spcPts val="0"/>
+              </a:spcAft>
+              <a:buNone/>
+            </a:pPr>
+            <a:r>
+              <a:rPr lang="en-US" sz="1533" b="0" i="0" u="none" strike="noStrike" dirty="0">
+                <a:solidFill>
+                  <a:srgbClr val="132442"/>
+                </a:solidFill>
+                <a:latin typeface="Calibri"/>
+                <a:cs typeface="Calibri"/>
+              </a:rPr>
+              <a:t>1,400</a:t>
+            </a:r>
+            <a:endParaRPr lang="en-US" sz="1533" b="0" i="0" u="none" strike="noStrike" dirty="0">
+              <a:solidFill>
+                <a:srgbClr val="132442"/>
+              </a:solidFill>
+              <a:latin typeface="Calibri"/>
+              <a:cs typeface="Calibri"/>
+            </a:endParaRPr>
+          </a:p>
+        </p:txBody>
+      </p:sp>
+      <p:sp>
+        <p:nvSpPr>
+          <p:cNvPr id="24" name="Rectangle 67"/>
+          <p:cNvSpPr/>
+          <p:nvPr/>
+        </p:nvSpPr>
+        <p:spPr>
+          <a:xfrm>
+            <a:off x="547980" y="6092149"/>
+            <a:ext cx="4619040" cy="424739"/>
+          </a:xfrm>
+          <a:prstGeom prst="rect">
+            <a:avLst/>
+          </a:prstGeom>
+          <a:solidFill>
+            <a:srgbClr val="13794D"/>
+          </a:solidFill>
+          <a:ln>
+            <a:noFill/>
+          </a:ln>
+        </p:spPr>
+        <p:txBody>
+          <a:bodyPr wrap="square" lIns="91440" tIns="45720" rIns="91440" bIns="45720" anchor="ctr" rtlCol="0">
+            <a:noAutofit/>
+          </a:bodyPr>
+          <a:lstStyle/>
+          <a:p>
+            <a:pPr algn="ctr" marL="0" indent="0">
+              <a:lnSpc>
+                <a:spcPct val="100000"/>
+              </a:lnSpc>
+              <a:spcBef>
+                <a:spcPts val="0"/>
+              </a:spcBef>
+              <a:spcAft>
+                <a:spcPts val="0"/>
+              </a:spcAft>
+              <a:buNone/>
+            </a:pPr>
+            <a:endParaRPr lang="en-US" sz="1800" b="0" i="0" u="none" strike="noStrike" dirty="0">
+              <a:solidFill>
+                <a:srgbClr val="FFFFFF"/>
+              </a:solidFill>
+              <a:latin typeface="Calibri"/>
+              <a:cs typeface="Calibri"/>
+            </a:endParaRPr>
+          </a:p>
+        </p:txBody>
+      </p:sp>
+      <p:sp>
+        <p:nvSpPr>
+          <p:cNvPr id="25" name="TextBox 68"/>
+          <p:cNvSpPr txBox="1"/>
+          <p:nvPr/>
+        </p:nvSpPr>
+        <p:spPr>
+          <a:xfrm>
+            <a:off x="689560" y="6162939"/>
+            <a:ext cx="1468890" cy="2981061"/>
+          </a:xfrm>
+          <a:prstGeom prst="rect">
+            <a:avLst/>
+          </a:prstGeom>
+          <a:noFill/>
+          <a:ln>
+            <a:noFill/>
+          </a:ln>
+        </p:spPr>
+        <p:txBody>
+          <a:bodyPr wrap="square" lIns="0" tIns="0" rIns="0" bIns="0" anchor="t" rtlCol="0">
+            <a:spAutoFit/>
+          </a:bodyPr>
+          <a:lstStyle/>
+          <a:p>
+            <a:pPr algn="l" marL="0" indent="0">
+              <a:lnSpc>
+                <a:spcPct val="100000"/>
+              </a:lnSpc>
+              <a:spcBef>
+                <a:spcPts val="0"/>
+              </a:spcBef>
+              <a:spcAft>
+                <a:spcPts val="0"/>
+              </a:spcAft>
+              <a:buNone/>
+            </a:pPr>
+            <a:r>
+              <a:rPr lang="en-US" sz="1533" b="1" i="0" u="none" strike="noStrike" dirty="0">
+                <a:solidFill>
+                  <a:srgbClr val="FFFFFF"/>
+                </a:solidFill>
+                <a:latin typeface="Calibri"/>
+                <a:cs typeface="Calibri"/>
+              </a:rPr>
+              <a:t>Total</a:t>
+            </a:r>
+            <a:endParaRPr lang="en-US" sz="1533" b="1" i="0" u="none" strike="noStrike" dirty="0">
+              <a:solidFill>
+                <a:srgbClr val="FFFFFF"/>
+              </a:solidFill>
+              <a:latin typeface="Calibri"/>
+              <a:cs typeface="Calibri"/>
+            </a:endParaRPr>
+          </a:p>
+        </p:txBody>
+      </p:sp>
+      <p:sp>
+        <p:nvSpPr>
+          <p:cNvPr id="26" name="TextBox 69"/>
+          <p:cNvSpPr txBox="1"/>
+          <p:nvPr/>
+        </p:nvSpPr>
+        <p:spPr>
+          <a:xfrm>
+            <a:off x="2229240" y="6162939"/>
+            <a:ext cx="1468890" cy="2981061"/>
+          </a:xfrm>
+          <a:prstGeom prst="rect">
+            <a:avLst/>
+          </a:prstGeom>
+          <a:noFill/>
+          <a:ln>
+            <a:noFill/>
+          </a:ln>
+        </p:spPr>
+        <p:txBody>
+          <a:bodyPr wrap="square" lIns="0" tIns="0" rIns="0" bIns="0" anchor="t" rtlCol="0">
+            <a:spAutoFit/>
+          </a:bodyPr>
+          <a:lstStyle/>
+          <a:p>
+            <a:pPr algn="l" marL="0" indent="0">
+              <a:lnSpc>
+                <a:spcPct val="100000"/>
+              </a:lnSpc>
+              <a:spcBef>
+                <a:spcPts val="0"/>
+              </a:spcBef>
+              <a:spcAft>
+                <a:spcPts val="0"/>
+              </a:spcAft>
+              <a:buNone/>
+            </a:pPr>
+            <a:r>
+              <a:rPr lang="en-US" sz="1533" b="1" i="0" u="none" strike="noStrike" dirty="0">
+                <a:solidFill>
+                  <a:srgbClr val="FFFFFF"/>
+                </a:solidFill>
+                <a:latin typeface="Calibri"/>
+                <a:cs typeface="Calibri"/>
+              </a:rPr>
+              <a:t>11,000</a:t>
+            </a:r>
+            <a:endParaRPr lang="en-US" sz="1533" b="1" i="0" u="none" strike="noStrike" dirty="0">
+              <a:solidFill>
+                <a:srgbClr val="FFFFFF"/>
+              </a:solidFill>
+              <a:latin typeface="Calibri"/>
+              <a:cs typeface="Calibri"/>
+            </a:endParaRPr>
+          </a:p>
+        </p:txBody>
+      </p:sp>
+      <p:sp>
+        <p:nvSpPr>
+          <p:cNvPr id="27" name="TextBox 70"/>
+          <p:cNvSpPr txBox="1"/>
+          <p:nvPr/>
+        </p:nvSpPr>
+        <p:spPr>
+          <a:xfrm>
+            <a:off x="3768920" y="6162939"/>
+            <a:ext cx="1468890" cy="2981061"/>
+          </a:xfrm>
+          <a:prstGeom prst="rect">
+            <a:avLst/>
+          </a:prstGeom>
+          <a:noFill/>
+          <a:ln>
+            <a:noFill/>
+          </a:ln>
+        </p:spPr>
+        <p:txBody>
+          <a:bodyPr wrap="square" lIns="0" tIns="0" rIns="0" bIns="0" anchor="t" rtlCol="0">
+            <a:spAutoFit/>
+          </a:bodyPr>
+          <a:lstStyle/>
+          <a:p>
+            <a:pPr algn="l" marL="0" indent="0">
+              <a:lnSpc>
+                <a:spcPct val="100000"/>
+              </a:lnSpc>
+              <a:spcBef>
+                <a:spcPts val="0"/>
+              </a:spcBef>
+              <a:spcAft>
+                <a:spcPts val="0"/>
+              </a:spcAft>
+              <a:buNone/>
+            </a:pPr>
+            <a:r>
+              <a:rPr lang="en-US" sz="1533" b="1" i="0" u="none" strike="noStrike" dirty="0">
+                <a:solidFill>
+                  <a:srgbClr val="FFFFFF"/>
+                </a:solidFill>
+                <a:latin typeface="Calibri"/>
+                <a:cs typeface="Calibri"/>
+              </a:rPr>
+              <a:t>10,000</a:t>
+            </a:r>
+            <a:endParaRPr lang="en-US" sz="1533" b="1" i="0" u="none" strike="noStrike" dirty="0">
+              <a:solidFill>
+                <a:srgbClr val="FFFFFF"/>
+              </a:solidFill>
+              <a:latin typeface="Calibri"/>
+              <a:cs typeface="Calibri"/>
+            </a:endParaRPr>
+          </a:p>
+        </p:txBody>
+      </p:sp>
+      <p:sp>
+        <p:nvSpPr>
+          <p:cNvPr id="28" name="TextBox 71"/>
+          <p:cNvSpPr txBox="1"/>
+          <p:nvPr/>
+        </p:nvSpPr>
+        <p:spPr>
+          <a:xfrm>
+            <a:off x="406400" y="8305800"/>
+            <a:ext cx="4902200" cy="838200"/>
+          </a:xfrm>
+          <a:prstGeom prst="rect">
+            <a:avLst/>
+          </a:prstGeom>
+          <a:noFill/>
+          <a:ln>
+            <a:noFill/>
+          </a:ln>
+        </p:spPr>
+        <p:txBody>
+          <a:bodyPr wrap="square" lIns="0" tIns="0" rIns="0" bIns="0" anchor="t" rtlCol="0">
+            <a:spAutoFit/>
+          </a:bodyPr>
+          <a:lstStyle/>
+          <a:p>
+            <a:pPr algn="l" marL="0" indent="0">
+              <a:lnSpc>
+                <a:spcPct val="100000"/>
+              </a:lnSpc>
+              <a:spcBef>
+                <a:spcPts val="0"/>
+              </a:spcBef>
+              <a:spcAft>
+                <a:spcPts val="0"/>
+              </a:spcAft>
+              <a:buNone/>
+            </a:pPr>
+            <a:r>
+              <a:rPr lang="en-US" sz="1300" b="1" i="0" u="none" strike="noStrike" dirty="0">
+                <a:solidFill>
+                  <a:srgbClr val="13794D"/>
+                </a:solidFill>
+                <a:latin typeface="Calibri"/>
+                <a:cs typeface="Calibri"/>
+              </a:rPr>
+              <a:t>XLSX  ·  CSV  ·  FORMULAS  ·  FILTERS</a:t>
+            </a:r>
+            <a:endParaRPr lang="en-US" sz="1300" b="1" i="0" u="none" strike="noStrike" dirty="0">
+              <a:solidFill>
+                <a:srgbClr val="13794D"/>
+              </a:solidFill>
+              <a:latin typeface="Calibri"/>
+              <a:cs typeface="Calibri"/>
+            </a:endParaRPr>
+          </a:p>
+        </p:txBody>
+      </p:sp>
+    </p:spTree>
+  </p:cSld>
+  <p:clrMapOvr>
+    <a:masterClrMapping/>
+  </p:clrMapOvr>
+  <p:transition spd="fast">
+    <p:fade/>
+  </p:transition>
+</p:sld>
+</file>
+
+<file path=ppt/slides/slide5.xml><?xml version="1.0" encoding="utf-8"?>
 <p:sld xmlns:a="http://schemas.openxmlformats.org/drawingml/2006/main" xmlns:r="http://schemas.openxmlformats.org/officeDocument/2006/relationships" xmlns:p="http://schemas.openxmlformats.org/presentationml/2006/main">
   <p:cSld>
     <p:bg>
@@ -3376,7 +6085,7 @@
       </p:grpSpPr>
       <p:sp>
         <p:nvSpPr>
-          <p:cNvPr id="2" name="TextBox 25"/>
+          <p:cNvPr id="2" name="TextBox 73"/>
           <p:cNvSpPr txBox="1"/>
           <p:nvPr/>
         </p:nvSpPr>
@@ -3419,7 +6128,7 @@
                 <a:latin typeface="Calibri"/>
                 <a:cs typeface="Calibri"/>
               </a:rPr>
-              <a:t>02  /  SIX PLATFORMS. ONE AMBITION.</a:t>
+              <a:t>04  /  SIX PLATFORMS. ONE AMBITION.</a:t>
             </a:r>
             <a:endParaRPr lang="en-US" sz="1300" b="1" i="0" u="none" strike="noStrike" dirty="0">
               <a:solidFill>
@@ -3433,7 +6142,7 @@
       </p:sp>
       <p:sp>
         <p:nvSpPr>
-          <p:cNvPr id="3" name="TextBox 26"/>
+          <p:cNvPr id="3" name="TextBox 74"/>
           <p:cNvSpPr txBox="1"/>
           <p:nvPr/>
         </p:nvSpPr>
@@ -3521,7 +6230,7 @@
       </p:sp>
       <p:sp>
         <p:nvSpPr>
-          <p:cNvPr id="4" name="Rounded Rectangle 27"/>
+          <p:cNvPr id="4" name="Rounded Rectangle 75"/>
           <p:cNvSpPr/>
           <p:nvPr/>
         </p:nvSpPr>
@@ -3570,7 +6279,7 @@
       </p:sp>
       <p:sp>
         <p:nvSpPr>
-          <p:cNvPr id="5" name="TextBox 28"/>
+          <p:cNvPr id="5" name="TextBox 76"/>
           <p:cNvSpPr txBox="1"/>
           <p:nvPr/>
         </p:nvSpPr>
@@ -3627,7 +6336,7 @@
       </p:sp>
       <p:sp>
         <p:nvSpPr>
-          <p:cNvPr id="6" name="TextBox 29"/>
+          <p:cNvPr id="6" name="TextBox 77"/>
           <p:cNvSpPr txBox="1"/>
           <p:nvPr/>
         </p:nvSpPr>
@@ -3684,7 +6393,7 @@
       </p:sp>
       <p:sp>
         <p:nvSpPr>
-          <p:cNvPr id="7" name="Rounded Rectangle 30"/>
+          <p:cNvPr id="7" name="Rounded Rectangle 78"/>
           <p:cNvSpPr/>
           <p:nvPr/>
         </p:nvSpPr>
@@ -3733,7 +6442,7 @@
       </p:sp>
       <p:sp>
         <p:nvSpPr>
-          <p:cNvPr id="8" name="TextBox 31"/>
+          <p:cNvPr id="8" name="TextBox 79"/>
           <p:cNvSpPr txBox="1"/>
           <p:nvPr/>
         </p:nvSpPr>
@@ -3790,7 +6499,7 @@
       </p:sp>
       <p:sp>
         <p:nvSpPr>
-          <p:cNvPr id="9" name="TextBox 32"/>
+          <p:cNvPr id="9" name="TextBox 80"/>
           <p:cNvSpPr txBox="1"/>
           <p:nvPr/>
         </p:nvSpPr>
@@ -3847,7 +6556,7 @@
       </p:sp>
       <p:sp>
         <p:nvSpPr>
-          <p:cNvPr id="10" name="Rounded Rectangle 33"/>
+          <p:cNvPr id="10" name="Rounded Rectangle 81"/>
           <p:cNvSpPr/>
           <p:nvPr/>
         </p:nvSpPr>
@@ -3896,7 +6605,7 @@
       </p:sp>
       <p:sp>
         <p:nvSpPr>
-          <p:cNvPr id="11" name="TextBox 34"/>
+          <p:cNvPr id="11" name="TextBox 82"/>
           <p:cNvSpPr txBox="1"/>
           <p:nvPr/>
         </p:nvSpPr>
@@ -3953,7 +6662,7 @@
       </p:sp>
       <p:sp>
         <p:nvSpPr>
-          <p:cNvPr id="12" name="TextBox 35"/>
+          <p:cNvPr id="12" name="TextBox 83"/>
           <p:cNvSpPr txBox="1"/>
           <p:nvPr/>
         </p:nvSpPr>
@@ -4010,7 +6719,7 @@
       </p:sp>
       <p:sp>
         <p:nvSpPr>
-          <p:cNvPr id="13" name="Rounded Rectangle 36"/>
+          <p:cNvPr id="13" name="Rounded Rectangle 84"/>
           <p:cNvSpPr/>
           <p:nvPr/>
         </p:nvSpPr>
@@ -4059,7 +6768,7 @@
       </p:sp>
       <p:sp>
         <p:nvSpPr>
-          <p:cNvPr id="14" name="TextBox 37"/>
+          <p:cNvPr id="14" name="TextBox 85"/>
           <p:cNvSpPr txBox="1"/>
           <p:nvPr/>
         </p:nvSpPr>
@@ -4116,7 +6825,7 @@
       </p:sp>
       <p:sp>
         <p:nvSpPr>
-          <p:cNvPr id="15" name="TextBox 38"/>
+          <p:cNvPr id="15" name="TextBox 86"/>
           <p:cNvSpPr txBox="1"/>
           <p:nvPr/>
         </p:nvSpPr>
@@ -4173,7 +6882,7 @@
       </p:sp>
       <p:sp>
         <p:nvSpPr>
-          <p:cNvPr id="16" name="Rounded Rectangle 39"/>
+          <p:cNvPr id="16" name="Rounded Rectangle 87"/>
           <p:cNvSpPr/>
           <p:nvPr/>
         </p:nvSpPr>
@@ -4222,7 +6931,7 @@
       </p:sp>
       <p:sp>
         <p:nvSpPr>
-          <p:cNvPr id="17" name="TextBox 40"/>
+          <p:cNvPr id="17" name="TextBox 88"/>
           <p:cNvSpPr txBox="1"/>
           <p:nvPr/>
         </p:nvSpPr>
@@ -4279,7 +6988,7 @@
       </p:sp>
       <p:sp>
         <p:nvSpPr>
-          <p:cNvPr id="18" name="TextBox 41"/>
+          <p:cNvPr id="18" name="TextBox 89"/>
           <p:cNvSpPr txBox="1"/>
           <p:nvPr/>
         </p:nvSpPr>
@@ -4336,7 +7045,7 @@
       </p:sp>
       <p:sp>
         <p:nvSpPr>
-          <p:cNvPr id="19" name="Rounded Rectangle 42"/>
+          <p:cNvPr id="19" name="Rounded Rectangle 90"/>
           <p:cNvSpPr/>
           <p:nvPr/>
         </p:nvSpPr>
@@ -4385,7 +7094,7 @@
       </p:sp>
       <p:sp>
         <p:nvSpPr>
-          <p:cNvPr id="20" name="TextBox 43"/>
+          <p:cNvPr id="20" name="TextBox 91"/>
           <p:cNvSpPr txBox="1"/>
           <p:nvPr/>
         </p:nvSpPr>
@@ -4442,7 +7151,7 @@
       </p:sp>
       <p:sp>
         <p:nvSpPr>
-          <p:cNvPr id="21" name="TextBox 44"/>
+          <p:cNvPr id="21" name="TextBox 92"/>
           <p:cNvSpPr txBox="1"/>
           <p:nvPr/>
         </p:nvSpPr>
@@ -4485,7 +7194,7 @@
                 <a:latin typeface="Calibri"/>
                 <a:cs typeface="Calibri"/>
               </a:rPr>
-              <a:t>Writer is live</a:t>
+              <a:t>In your browser</a:t>
             </a:r>
             <a:endParaRPr lang="en-US" sz="1500" b="0" i="0" u="none" strike="noStrike" dirty="0">
               <a:solidFill>
@@ -4499,7 +7208,7 @@
       </p:sp>
       <p:sp>
         <p:nvSpPr>
-          <p:cNvPr id="22" name="TextBox 45"/>
+          <p:cNvPr id="22" name="TextBox 93"/>
           <p:cNvSpPr txBox="1"/>
           <p:nvPr/>
         </p:nvSpPr>
@@ -4542,7 +7251,7 @@
                 <a:latin typeface="Calibri"/>
                 <a:cs typeface="Calibri"/>
               </a:rPr>
-              <a:t>Writer is available on the web today.</a:t>
+              <a:t>Documents. Presentations. Spreadsheets.</a:t>
             </a:r>
             <a:endParaRPr lang="en-US" sz="1600" b="0" i="0" u="none" strike="noStrike" dirty="0">
               <a:solidFill>
@@ -4573,7 +7282,7 @@
                 <a:latin typeface="Calibri"/>
                 <a:cs typeface="Calibri"/>
               </a:rPr>
-              <a:t>More apps and platforms are on the way.</a:t>
+              <a:t>Across your devices. Built in the open.</a:t>
             </a:r>
             <a:endParaRPr lang="en-US" sz="1600" b="0" i="0" u="none" strike="noStrike" dirty="0">
               <a:solidFill>
@@ -4596,7 +7305,7 @@
 </p:sld>
 </file>
 
-<file path=ppt/slides/slide4.xml><?xml version="1.0" encoding="utf-8"?>
+<file path=ppt/slides/slide6.xml><?xml version="1.0" encoding="utf-8"?>
 <p:sld xmlns:a="http://schemas.openxmlformats.org/drawingml/2006/main" xmlns:r="http://schemas.openxmlformats.org/officeDocument/2006/relationships" xmlns:p="http://schemas.openxmlformats.org/presentationml/2006/main">
   <p:cSld>
     <p:bg>
@@ -4623,7 +7332,7 @@
       </p:grpSpPr>
       <p:sp>
         <p:nvSpPr>
-          <p:cNvPr id="2" name="TextBox 47"/>
+          <p:cNvPr id="2" name="TextBox 95"/>
           <p:cNvSpPr txBox="1"/>
           <p:nvPr/>
         </p:nvSpPr>
@@ -4666,7 +7375,7 @@
                 <a:latin typeface="Calibri"/>
                 <a:cs typeface="Calibri"/>
               </a:rPr>
-              <a:t>03  /  OPEN SOURCE. FROM THE START.</a:t>
+              <a:t>05  /  OPEN SOURCE. FROM THE START.</a:t>
             </a:r>
             <a:endParaRPr lang="en-US" sz="1300" b="1" i="0" u="none" strike="noStrike" dirty="0">
               <a:solidFill>
@@ -4680,7 +7389,7 @@
       </p:sp>
       <p:sp>
         <p:nvSpPr>
-          <p:cNvPr id="3" name="TextBox 48"/>
+          <p:cNvPr id="3" name="TextBox 96"/>
           <p:cNvSpPr txBox="1"/>
           <p:nvPr/>
         </p:nvSpPr>
@@ -4799,7 +7508,7 @@
       </p:sp>
       <p:sp>
         <p:nvSpPr>
-          <p:cNvPr id="4" name="TextBox 49"/>
+          <p:cNvPr id="4" name="TextBox 97"/>
           <p:cNvSpPr txBox="1"/>
           <p:nvPr/>
         </p:nvSpPr>
@@ -4887,7 +7596,7 @@
       </p:sp>
       <p:sp>
         <p:nvSpPr>
-          <p:cNvPr id="5" name="TextBox 50"/>
+          <p:cNvPr id="5" name="TextBox 98"/>
           <p:cNvSpPr txBox="1"/>
           <p:nvPr/>
         </p:nvSpPr>
@@ -4975,7 +7684,7 @@
       </p:sp>
       <p:sp>
         <p:nvSpPr>
-          <p:cNvPr id="6" name="TextBox 51"/>
+          <p:cNvPr id="6" name="TextBox 99"/>
           <p:cNvSpPr txBox="1"/>
           <p:nvPr/>
         </p:nvSpPr>
@@ -5018,7 +7727,7 @@
                 <a:latin typeface="Calibri"/>
                 <a:cs typeface="Calibri"/>
               </a:rPr>
-              <a:t>ONLY WRITER IS AVAILABLE SO FAR.</a:t>
+              <a:t>WRITER  ·  SLIDES  ·  SHEETS</a:t>
             </a:r>
             <a:endParaRPr lang="en-US" sz="1300" b="1" i="0" u="none" strike="noStrike" dirty="0">
               <a:solidFill>

--- a/slides/landing-tall.pptx
+++ b/slides/landing-tall.pptx
@@ -1705,7 +1705,7 @@
             <a:spLocks noGrp="1"/>
           </p:cNvSpPr>
           <p:nvPr>
-            <p:ph idx="1"/>
+            <p:ph type="body" idx="1"/>
           </p:nvPr>
         </p:nvSpPr>
         <p:spPr>
@@ -3578,33 +3578,456 @@
           </a:p>
         </p:txBody>
       </p:sp>
-      <p:pic>
-        <p:nvPicPr>
-          <p:cNvPr id="5" name="Picture 28"/>
-          <p:cNvPicPr>
-            <a:picLocks noChangeAspect="1"/>
-          </p:cNvPicPr>
-          <p:nvPr/>
-        </p:nvPicPr>
-        <p:blipFill>
-          <a:blip r:embed="rIdImg1"/>
-          <a:stretch>
-            <a:fillRect/>
-          </a:stretch>
-        </p:blipFill>
-        <p:spPr>
-          <a:xfrm>
-            <a:off x="406400" y="3479800"/>
-            <a:ext cx="4902200" cy="3268129"/>
+      <p:sp>
+        <p:nvSpPr>
+          <p:cNvPr id="5" name="Rounded Rectangle 28"/>
+          <p:cNvSpPr/>
+          <p:nvPr/>
+        </p:nvSpPr>
+        <p:spPr>
+          <a:xfrm>
+            <a:off x="406400" y="3606800"/>
+            <a:ext cx="4902200" cy="3130967"/>
+          </a:xfrm>
+          <a:prstGeom prst="roundRect">
+            <a:avLst/>
+          </a:prstGeom>
+          <a:solidFill>
+            <a:srgbClr val="FFFFFF"/>
+          </a:solidFill>
+          <a:ln>
+            <a:noFill/>
+          </a:ln>
+        </p:spPr>
+        <p:txBody>
+          <a:bodyPr wrap="square" lIns="91440" tIns="45720" rIns="91440" bIns="45720" anchor="ctr" rtlCol="0">
+            <a:noAutofit/>
+          </a:bodyPr>
+          <a:lstStyle/>
+          <a:p>
+            <a:pPr algn="ctr" marL="0" indent="0">
+              <a:lnSpc>
+                <a:spcPct val="100000"/>
+              </a:lnSpc>
+              <a:spcBef>
+                <a:spcPts val="0"/>
+              </a:spcBef>
+              <a:spcAft>
+                <a:spcPts val="0"/>
+              </a:spcAft>
+              <a:buNone/>
+            </a:pPr>
+            <a:endParaRPr lang="en-US" sz="1800" b="0" i="0" u="none" strike="noStrike" dirty="0">
+              <a:solidFill>
+                <a:srgbClr val="FFFFFF"/>
+              </a:solidFill>
+              <a:latin typeface="Calibri"/>
+              <a:cs typeface="Calibri"/>
+            </a:endParaRPr>
+          </a:p>
+        </p:txBody>
+      </p:sp>
+      <p:sp>
+        <p:nvSpPr>
+          <p:cNvPr id="6" name="TextBox 29"/>
+          <p:cNvSpPr txBox="1"/>
+          <p:nvPr/>
+        </p:nvSpPr>
+        <p:spPr>
+          <a:xfrm>
+            <a:off x="719497" y="3848332"/>
+            <a:ext cx="4276007" cy="5295668"/>
           </a:xfrm>
           <a:prstGeom prst="rect">
             <a:avLst/>
           </a:prstGeom>
-        </p:spPr>
-      </p:pic>
-      <p:sp>
-        <p:nvSpPr>
-          <p:cNvPr id="6" name="TextBox 29"/>
+          <a:noFill/>
+          <a:ln>
+            <a:noFill/>
+          </a:ln>
+        </p:spPr>
+        <p:txBody>
+          <a:bodyPr wrap="square" lIns="0" tIns="0" rIns="0" bIns="0" anchor="t" rtlCol="0">
+            <a:spAutoFit/>
+          </a:bodyPr>
+          <a:lstStyle/>
+          <a:p>
+            <a:pPr algn="l" marL="0" indent="0">
+              <a:lnSpc>
+                <a:spcPct val="100000"/>
+              </a:lnSpc>
+              <a:spcBef>
+                <a:spcPts val="0"/>
+              </a:spcBef>
+              <a:spcAft>
+                <a:spcPts val="0"/>
+              </a:spcAft>
+              <a:buNone/>
+            </a:pPr>
+            <a:r>
+              <a:rPr lang="en-US" sz="1057" b="1" i="0" u="none" strike="noStrike" dirty="0">
+                <a:solidFill>
+                  <a:srgbClr val="2449DF"/>
+                </a:solidFill>
+                <a:latin typeface="Calibri"/>
+                <a:cs typeface="Calibri"/>
+              </a:rPr>
+              <a:t>PROJECT NOTES</a:t>
+            </a:r>
+            <a:endParaRPr lang="en-US" sz="1057" b="1" i="0" u="none" strike="noStrike" dirty="0">
+              <a:solidFill>
+                <a:srgbClr val="2449DF"/>
+              </a:solidFill>
+              <a:latin typeface="Calibri"/>
+              <a:cs typeface="Calibri"/>
+            </a:endParaRPr>
+          </a:p>
+        </p:txBody>
+      </p:sp>
+      <p:sp>
+        <p:nvSpPr>
+          <p:cNvPr id="7" name="TextBox 30"/>
+          <p:cNvSpPr txBox="1"/>
+          <p:nvPr/>
+        </p:nvSpPr>
+        <p:spPr>
+          <a:xfrm>
+            <a:off x="719497" y="4188265"/>
+            <a:ext cx="4276007" cy="4955735"/>
+          </a:xfrm>
+          <a:prstGeom prst="rect">
+            <a:avLst/>
+          </a:prstGeom>
+          <a:noFill/>
+          <a:ln>
+            <a:noFill/>
+          </a:ln>
+        </p:spPr>
+        <p:txBody>
+          <a:bodyPr wrap="square" lIns="0" tIns="0" rIns="0" bIns="0" anchor="t" rtlCol="0">
+            <a:spAutoFit/>
+          </a:bodyPr>
+          <a:lstStyle/>
+          <a:p>
+            <a:pPr algn="l" marL="0" indent="0">
+              <a:lnSpc>
+                <a:spcPct val="100000"/>
+              </a:lnSpc>
+              <a:spcBef>
+                <a:spcPts val="0"/>
+              </a:spcBef>
+              <a:spcAft>
+                <a:spcPts val="0"/>
+              </a:spcAft>
+              <a:buNone/>
+            </a:pPr>
+            <a:r>
+              <a:rPr lang="en-US" sz="2536" b="1" i="0" u="none" strike="noStrike" dirty="0">
+                <a:solidFill>
+                  <a:srgbClr val="132442"/>
+                </a:solidFill>
+                <a:latin typeface="Calibri"/>
+                <a:cs typeface="Calibri"/>
+              </a:rPr>
+              <a:t>Your next big idea.</a:t>
+            </a:r>
+            <a:endParaRPr lang="en-US" sz="2536" b="1" i="0" u="none" strike="noStrike" dirty="0">
+              <a:solidFill>
+                <a:srgbClr val="132442"/>
+              </a:solidFill>
+              <a:latin typeface="Calibri"/>
+              <a:cs typeface="Calibri"/>
+            </a:endParaRPr>
+          </a:p>
+        </p:txBody>
+      </p:sp>
+      <p:sp>
+        <p:nvSpPr>
+          <p:cNvPr id="8" name="Rectangle 31"/>
+          <p:cNvSpPr/>
+          <p:nvPr/>
+        </p:nvSpPr>
+        <p:spPr>
+          <a:xfrm>
+            <a:off x="719497" y="4725003"/>
+            <a:ext cx="4276007" cy="26837"/>
+          </a:xfrm>
+          <a:prstGeom prst="rect">
+            <a:avLst/>
+          </a:prstGeom>
+          <a:solidFill>
+            <a:srgbClr val="2449DF"/>
+          </a:solidFill>
+          <a:ln>
+            <a:noFill/>
+          </a:ln>
+        </p:spPr>
+        <p:txBody>
+          <a:bodyPr wrap="square" lIns="91440" tIns="45720" rIns="91440" bIns="45720" anchor="ctr" rtlCol="0">
+            <a:noAutofit/>
+          </a:bodyPr>
+          <a:lstStyle/>
+          <a:p>
+            <a:pPr algn="ctr" marL="0" indent="0">
+              <a:lnSpc>
+                <a:spcPct val="100000"/>
+              </a:lnSpc>
+              <a:spcBef>
+                <a:spcPts val="0"/>
+              </a:spcBef>
+              <a:spcAft>
+                <a:spcPts val="0"/>
+              </a:spcAft>
+              <a:buNone/>
+            </a:pPr>
+            <a:endParaRPr lang="en-US" sz="1800" b="0" i="0" u="none" strike="noStrike" dirty="0">
+              <a:solidFill>
+                <a:srgbClr val="FFFFFF"/>
+              </a:solidFill>
+              <a:latin typeface="Calibri"/>
+              <a:cs typeface="Calibri"/>
+            </a:endParaRPr>
+          </a:p>
+        </p:txBody>
+      </p:sp>
+      <p:sp>
+        <p:nvSpPr>
+          <p:cNvPr id="9" name="TextBox 32"/>
+          <p:cNvSpPr txBox="1"/>
+          <p:nvPr/>
+        </p:nvSpPr>
+        <p:spPr>
+          <a:xfrm>
+            <a:off x="719497" y="4975480"/>
+            <a:ext cx="4276007" cy="4168520"/>
+          </a:xfrm>
+          <a:prstGeom prst="rect">
+            <a:avLst/>
+          </a:prstGeom>
+          <a:noFill/>
+          <a:ln>
+            <a:noFill/>
+          </a:ln>
+        </p:spPr>
+        <p:txBody>
+          <a:bodyPr wrap="square" lIns="0" tIns="0" rIns="0" bIns="0" anchor="t" rtlCol="0">
+            <a:spAutoFit/>
+          </a:bodyPr>
+          <a:lstStyle/>
+          <a:p>
+            <a:pPr algn="l" marL="0" indent="0">
+              <a:lnSpc>
+                <a:spcPct val="100000"/>
+              </a:lnSpc>
+              <a:spcBef>
+                <a:spcPts val="0"/>
+              </a:spcBef>
+              <a:spcAft>
+                <a:spcPts val="0"/>
+              </a:spcAft>
+              <a:buNone/>
+            </a:pPr>
+            <a:r>
+              <a:rPr lang="en-US" sz="1761" b="0" i="0" u="none" strike="noStrike" dirty="0">
+                <a:solidFill>
+                  <a:srgbClr val="536782"/>
+                </a:solidFill>
+                <a:latin typeface="Calibri"/>
+                <a:cs typeface="Calibri"/>
+              </a:rPr>
+              <a:t>Start with a thought.</a:t>
+            </a:r>
+            <a:endParaRPr lang="en-US" sz="1761" b="0" i="0" u="none" strike="noStrike" dirty="0">
+              <a:solidFill>
+                <a:srgbClr val="536782"/>
+              </a:solidFill>
+              <a:latin typeface="Calibri"/>
+              <a:cs typeface="Calibri"/>
+            </a:endParaRPr>
+          </a:p>
+          <a:p>
+            <a:pPr algn="l" marL="0" indent="0">
+              <a:lnSpc>
+                <a:spcPct val="100000"/>
+              </a:lnSpc>
+              <a:spcBef>
+                <a:spcPts val="0"/>
+              </a:spcBef>
+              <a:spcAft>
+                <a:spcPts val="0"/>
+              </a:spcAft>
+              <a:buNone/>
+            </a:pPr>
+            <a:r>
+              <a:rPr lang="en-US" sz="1761" b="0" i="0" u="none" strike="noStrike" dirty="0">
+                <a:solidFill>
+                  <a:srgbClr val="536782"/>
+                </a:solidFill>
+                <a:latin typeface="Calibri"/>
+                <a:cs typeface="Calibri"/>
+              </a:rPr>
+              <a:t>Give it room to grow.</a:t>
+            </a:r>
+            <a:endParaRPr lang="en-US" sz="1761" b="0" i="0" u="none" strike="noStrike" dirty="0">
+              <a:solidFill>
+                <a:srgbClr val="536782"/>
+              </a:solidFill>
+              <a:latin typeface="Calibri"/>
+              <a:cs typeface="Calibri"/>
+            </a:endParaRPr>
+          </a:p>
+        </p:txBody>
+      </p:sp>
+      <p:sp>
+        <p:nvSpPr>
+          <p:cNvPr id="10" name="Rounded Rectangle 33"/>
+          <p:cNvSpPr/>
+          <p:nvPr/>
+        </p:nvSpPr>
+        <p:spPr>
+          <a:xfrm>
+            <a:off x="719497" y="5843205"/>
+            <a:ext cx="3846617" cy="71565"/>
+          </a:xfrm>
+          <a:prstGeom prst="roundRect">
+            <a:avLst/>
+          </a:prstGeom>
+          <a:solidFill>
+            <a:srgbClr val="E3E9FA"/>
+          </a:solidFill>
+          <a:ln>
+            <a:noFill/>
+          </a:ln>
+        </p:spPr>
+        <p:txBody>
+          <a:bodyPr wrap="square" lIns="91440" tIns="45720" rIns="91440" bIns="45720" anchor="ctr" rtlCol="0">
+            <a:noAutofit/>
+          </a:bodyPr>
+          <a:lstStyle/>
+          <a:p>
+            <a:pPr algn="ctr" marL="0" indent="0">
+              <a:lnSpc>
+                <a:spcPct val="100000"/>
+              </a:lnSpc>
+              <a:spcBef>
+                <a:spcPts val="0"/>
+              </a:spcBef>
+              <a:spcAft>
+                <a:spcPts val="0"/>
+              </a:spcAft>
+              <a:buNone/>
+            </a:pPr>
+            <a:endParaRPr lang="en-US" sz="1800" b="0" i="0" u="none" strike="noStrike" dirty="0">
+              <a:solidFill>
+                <a:srgbClr val="FFFFFF"/>
+              </a:solidFill>
+              <a:latin typeface="Calibri"/>
+              <a:cs typeface="Calibri"/>
+            </a:endParaRPr>
+          </a:p>
+        </p:txBody>
+      </p:sp>
+      <p:sp>
+        <p:nvSpPr>
+          <p:cNvPr id="11" name="Rounded Rectangle 34"/>
+          <p:cNvSpPr/>
+          <p:nvPr/>
+        </p:nvSpPr>
+        <p:spPr>
+          <a:xfrm>
+            <a:off x="719497" y="6057900"/>
+            <a:ext cx="4276007" cy="71565"/>
+          </a:xfrm>
+          <a:prstGeom prst="roundRect">
+            <a:avLst/>
+          </a:prstGeom>
+          <a:solidFill>
+            <a:srgbClr val="E3E9FA"/>
+          </a:solidFill>
+          <a:ln>
+            <a:noFill/>
+          </a:ln>
+        </p:spPr>
+        <p:txBody>
+          <a:bodyPr wrap="square" lIns="91440" tIns="45720" rIns="91440" bIns="45720" anchor="ctr" rtlCol="0">
+            <a:noAutofit/>
+          </a:bodyPr>
+          <a:lstStyle/>
+          <a:p>
+            <a:pPr algn="ctr" marL="0" indent="0">
+              <a:lnSpc>
+                <a:spcPct val="100000"/>
+              </a:lnSpc>
+              <a:spcBef>
+                <a:spcPts val="0"/>
+              </a:spcBef>
+              <a:spcAft>
+                <a:spcPts val="0"/>
+              </a:spcAft>
+              <a:buNone/>
+            </a:pPr>
+            <a:endParaRPr lang="en-US" sz="1800" b="0" i="0" u="none" strike="noStrike" dirty="0">
+              <a:solidFill>
+                <a:srgbClr val="FFFFFF"/>
+              </a:solidFill>
+              <a:latin typeface="Calibri"/>
+              <a:cs typeface="Calibri"/>
+            </a:endParaRPr>
+          </a:p>
+        </p:txBody>
+      </p:sp>
+      <p:sp>
+        <p:nvSpPr>
+          <p:cNvPr id="12" name="Rounded Rectangle 35"/>
+          <p:cNvSpPr/>
+          <p:nvPr/>
+        </p:nvSpPr>
+        <p:spPr>
+          <a:xfrm>
+            <a:off x="719497" y="6272595"/>
+            <a:ext cx="2952055" cy="71565"/>
+          </a:xfrm>
+          <a:prstGeom prst="roundRect">
+            <a:avLst/>
+          </a:prstGeom>
+          <a:solidFill>
+            <a:srgbClr val="E3E9FA"/>
+          </a:solidFill>
+          <a:ln>
+            <a:noFill/>
+          </a:ln>
+        </p:spPr>
+        <p:txBody>
+          <a:bodyPr wrap="square" lIns="91440" tIns="45720" rIns="91440" bIns="45720" anchor="ctr" rtlCol="0">
+            <a:noAutofit/>
+          </a:bodyPr>
+          <a:lstStyle/>
+          <a:p>
+            <a:pPr algn="ctr" marL="0" indent="0">
+              <a:lnSpc>
+                <a:spcPct val="100000"/>
+              </a:lnSpc>
+              <a:spcBef>
+                <a:spcPts val="0"/>
+              </a:spcBef>
+              <a:spcAft>
+                <a:spcPts val="0"/>
+              </a:spcAft>
+              <a:buNone/>
+            </a:pPr>
+            <a:endParaRPr lang="en-US" sz="1800" b="0" i="0" u="none" strike="noStrike" dirty="0">
+              <a:solidFill>
+                <a:srgbClr val="FFFFFF"/>
+              </a:solidFill>
+              <a:latin typeface="Calibri"/>
+              <a:cs typeface="Calibri"/>
+            </a:endParaRPr>
+          </a:p>
+        </p:txBody>
+      </p:sp>
+      <p:sp>
+        <p:nvSpPr>
+          <p:cNvPr id="13" name="TextBox 36"/>
           <p:cNvSpPr txBox="1"/>
           <p:nvPr/>
         </p:nvSpPr>
@@ -3697,7 +4120,7 @@
       </p:grpSpPr>
       <p:sp>
         <p:nvSpPr>
-          <p:cNvPr id="2" name="TextBox 31"/>
+          <p:cNvPr id="2" name="TextBox 38"/>
           <p:cNvSpPr txBox="1"/>
           <p:nvPr/>
         </p:nvSpPr>
@@ -3754,7 +4177,7 @@
       </p:sp>
       <p:sp>
         <p:nvSpPr>
-          <p:cNvPr id="3" name="TextBox 32"/>
+          <p:cNvPr id="3" name="TextBox 39"/>
           <p:cNvSpPr txBox="1"/>
           <p:nvPr/>
         </p:nvSpPr>
@@ -3842,7 +4265,7 @@
       </p:sp>
       <p:sp>
         <p:nvSpPr>
-          <p:cNvPr id="4" name="TextBox 33"/>
+          <p:cNvPr id="4" name="TextBox 40"/>
           <p:cNvSpPr txBox="1"/>
           <p:nvPr/>
         </p:nvSpPr>
@@ -3930,7 +4353,7 @@
       </p:sp>
       <p:sp>
         <p:nvSpPr>
-          <p:cNvPr id="5" name="Rounded Rectangle 34"/>
+          <p:cNvPr id="5" name="Rounded Rectangle 41"/>
           <p:cNvSpPr/>
           <p:nvPr/>
         </p:nvSpPr>
@@ -3979,7 +4402,7 @@
       </p:sp>
       <p:sp>
         <p:nvSpPr>
-          <p:cNvPr id="6" name="TextBox 35"/>
+          <p:cNvPr id="6" name="TextBox 42"/>
           <p:cNvSpPr txBox="1"/>
           <p:nvPr/>
         </p:nvSpPr>
@@ -4036,7 +4459,7 @@
       </p:sp>
       <p:sp>
         <p:nvSpPr>
-          <p:cNvPr id="7" name="TextBox 36"/>
+          <p:cNvPr id="7" name="TextBox 43"/>
           <p:cNvSpPr txBox="1"/>
           <p:nvPr/>
         </p:nvSpPr>
@@ -4093,7 +4516,7 @@
       </p:sp>
       <p:sp>
         <p:nvSpPr>
-          <p:cNvPr id="8" name="Rounded Rectangle 37"/>
+          <p:cNvPr id="8" name="Rounded Rectangle 44"/>
           <p:cNvSpPr/>
           <p:nvPr/>
         </p:nvSpPr>
@@ -4142,7 +4565,7 @@
       </p:sp>
       <p:sp>
         <p:nvSpPr>
-          <p:cNvPr id="9" name="Rounded Rectangle 38"/>
+          <p:cNvPr id="9" name="Rounded Rectangle 45"/>
           <p:cNvSpPr/>
           <p:nvPr/>
         </p:nvSpPr>
@@ -4191,7 +4614,7 @@
       </p:sp>
       <p:sp>
         <p:nvSpPr>
-          <p:cNvPr id="10" name="Rounded Rectangle 39"/>
+          <p:cNvPr id="10" name="Rounded Rectangle 46"/>
           <p:cNvSpPr/>
           <p:nvPr/>
         </p:nvSpPr>
@@ -4240,7 +4663,7 @@
       </p:sp>
       <p:sp>
         <p:nvSpPr>
-          <p:cNvPr id="11" name="TextBox 40"/>
+          <p:cNvPr id="11" name="TextBox 47"/>
           <p:cNvSpPr txBox="1"/>
           <p:nvPr/>
         </p:nvSpPr>
@@ -4297,7 +4720,7 @@
       </p:sp>
       <p:sp>
         <p:nvSpPr>
-          <p:cNvPr id="12" name="TextBox 41"/>
+          <p:cNvPr id="12" name="TextBox 48"/>
           <p:cNvSpPr txBox="1"/>
           <p:nvPr/>
         </p:nvSpPr>
@@ -4354,7 +4777,7 @@
       </p:sp>
       <p:sp>
         <p:nvSpPr>
-          <p:cNvPr id="13" name="TextBox 42"/>
+          <p:cNvPr id="13" name="TextBox 49"/>
           <p:cNvSpPr txBox="1"/>
           <p:nvPr/>
         </p:nvSpPr>
@@ -4411,7 +4834,7 @@
       </p:sp>
       <p:sp>
         <p:nvSpPr>
-          <p:cNvPr id="14" name="TextBox 43"/>
+          <p:cNvPr id="14" name="TextBox 50"/>
           <p:cNvSpPr txBox="1"/>
           <p:nvPr/>
         </p:nvSpPr>
@@ -4504,7 +4927,7 @@
       </p:grpSpPr>
       <p:sp>
         <p:nvSpPr>
-          <p:cNvPr id="2" name="TextBox 45"/>
+          <p:cNvPr id="2" name="TextBox 52"/>
           <p:cNvSpPr txBox="1"/>
           <p:nvPr/>
         </p:nvSpPr>
@@ -4561,7 +4984,7 @@
       </p:sp>
       <p:sp>
         <p:nvSpPr>
-          <p:cNvPr id="3" name="TextBox 46"/>
+          <p:cNvPr id="3" name="TextBox 53"/>
           <p:cNvSpPr txBox="1"/>
           <p:nvPr/>
         </p:nvSpPr>
@@ -4649,7 +5072,7 @@
       </p:sp>
       <p:sp>
         <p:nvSpPr>
-          <p:cNvPr id="4" name="TextBox 47"/>
+          <p:cNvPr id="4" name="TextBox 54"/>
           <p:cNvSpPr txBox="1"/>
           <p:nvPr/>
         </p:nvSpPr>
@@ -4737,7 +5160,7 @@
       </p:sp>
       <p:sp>
         <p:nvSpPr>
-          <p:cNvPr id="5" name="Rounded Rectangle 48"/>
+          <p:cNvPr id="5" name="Rounded Rectangle 55"/>
           <p:cNvSpPr/>
           <p:nvPr/>
         </p:nvSpPr>
@@ -4786,7 +5209,7 @@
       </p:sp>
       <p:sp>
         <p:nvSpPr>
-          <p:cNvPr id="6" name="Rounded Rectangle 49"/>
+          <p:cNvPr id="6" name="Rounded Rectangle 56"/>
           <p:cNvSpPr/>
           <p:nvPr/>
         </p:nvSpPr>
@@ -4835,7 +5258,7 @@
       </p:sp>
       <p:sp>
         <p:nvSpPr>
-          <p:cNvPr id="7" name="TextBox 50"/>
+          <p:cNvPr id="7" name="TextBox 57"/>
           <p:cNvSpPr txBox="1"/>
           <p:nvPr/>
         </p:nvSpPr>
@@ -4892,7 +5315,7 @@
       </p:sp>
       <p:sp>
         <p:nvSpPr>
-          <p:cNvPr id="8" name="Rectangle 51"/>
+          <p:cNvPr id="8" name="Rectangle 58"/>
           <p:cNvSpPr/>
           <p:nvPr/>
         </p:nvSpPr>
@@ -4941,7 +5364,7 @@
       </p:sp>
       <p:sp>
         <p:nvSpPr>
-          <p:cNvPr id="9" name="TextBox 52"/>
+          <p:cNvPr id="9" name="TextBox 59"/>
           <p:cNvSpPr txBox="1"/>
           <p:nvPr/>
         </p:nvSpPr>
@@ -4998,7 +5421,7 @@
       </p:sp>
       <p:sp>
         <p:nvSpPr>
-          <p:cNvPr id="10" name="TextBox 53"/>
+          <p:cNvPr id="10" name="TextBox 60"/>
           <p:cNvSpPr txBox="1"/>
           <p:nvPr/>
         </p:nvSpPr>
@@ -5055,7 +5478,7 @@
       </p:sp>
       <p:sp>
         <p:nvSpPr>
-          <p:cNvPr id="11" name="TextBox 54"/>
+          <p:cNvPr id="11" name="TextBox 61"/>
           <p:cNvSpPr txBox="1"/>
           <p:nvPr/>
         </p:nvSpPr>
@@ -5112,7 +5535,7 @@
       </p:sp>
       <p:sp>
         <p:nvSpPr>
-          <p:cNvPr id="12" name="Rectangle 55"/>
+          <p:cNvPr id="12" name="Rectangle 62"/>
           <p:cNvSpPr/>
           <p:nvPr/>
         </p:nvSpPr>
@@ -5161,7 +5584,7 @@
       </p:sp>
       <p:sp>
         <p:nvSpPr>
-          <p:cNvPr id="13" name="TextBox 56"/>
+          <p:cNvPr id="13" name="TextBox 63"/>
           <p:cNvSpPr txBox="1"/>
           <p:nvPr/>
         </p:nvSpPr>
@@ -5218,7 +5641,7 @@
       </p:sp>
       <p:sp>
         <p:nvSpPr>
-          <p:cNvPr id="14" name="TextBox 57"/>
+          <p:cNvPr id="14" name="TextBox 64"/>
           <p:cNvSpPr txBox="1"/>
           <p:nvPr/>
         </p:nvSpPr>
@@ -5275,7 +5698,7 @@
       </p:sp>
       <p:sp>
         <p:nvSpPr>
-          <p:cNvPr id="15" name="TextBox 58"/>
+          <p:cNvPr id="15" name="TextBox 65"/>
           <p:cNvSpPr txBox="1"/>
           <p:nvPr/>
         </p:nvSpPr>
@@ -5332,7 +5755,7 @@
       </p:sp>
       <p:sp>
         <p:nvSpPr>
-          <p:cNvPr id="16" name="Rectangle 59"/>
+          <p:cNvPr id="16" name="Rectangle 66"/>
           <p:cNvSpPr/>
           <p:nvPr/>
         </p:nvSpPr>
@@ -5381,7 +5804,7 @@
       </p:sp>
       <p:sp>
         <p:nvSpPr>
-          <p:cNvPr id="17" name="TextBox 60"/>
+          <p:cNvPr id="17" name="TextBox 67"/>
           <p:cNvSpPr txBox="1"/>
           <p:nvPr/>
         </p:nvSpPr>
@@ -5438,7 +5861,7 @@
       </p:sp>
       <p:sp>
         <p:nvSpPr>
-          <p:cNvPr id="18" name="TextBox 61"/>
+          <p:cNvPr id="18" name="TextBox 68"/>
           <p:cNvSpPr txBox="1"/>
           <p:nvPr/>
         </p:nvSpPr>
@@ -5495,7 +5918,7 @@
       </p:sp>
       <p:sp>
         <p:nvSpPr>
-          <p:cNvPr id="19" name="TextBox 62"/>
+          <p:cNvPr id="19" name="TextBox 69"/>
           <p:cNvSpPr txBox="1"/>
           <p:nvPr/>
         </p:nvSpPr>
@@ -5552,7 +5975,7 @@
       </p:sp>
       <p:sp>
         <p:nvSpPr>
-          <p:cNvPr id="20" name="Rectangle 63"/>
+          <p:cNvPr id="20" name="Rectangle 70"/>
           <p:cNvSpPr/>
           <p:nvPr/>
         </p:nvSpPr>
@@ -5601,7 +6024,7 @@
       </p:sp>
       <p:sp>
         <p:nvSpPr>
-          <p:cNvPr id="21" name="TextBox 64"/>
+          <p:cNvPr id="21" name="TextBox 71"/>
           <p:cNvSpPr txBox="1"/>
           <p:nvPr/>
         </p:nvSpPr>
@@ -5658,7 +6081,7 @@
       </p:sp>
       <p:sp>
         <p:nvSpPr>
-          <p:cNvPr id="22" name="TextBox 65"/>
+          <p:cNvPr id="22" name="TextBox 72"/>
           <p:cNvSpPr txBox="1"/>
           <p:nvPr/>
         </p:nvSpPr>
@@ -5715,7 +6138,7 @@
       </p:sp>
       <p:sp>
         <p:nvSpPr>
-          <p:cNvPr id="23" name="TextBox 66"/>
+          <p:cNvPr id="23" name="TextBox 73"/>
           <p:cNvSpPr txBox="1"/>
           <p:nvPr/>
         </p:nvSpPr>
@@ -5772,7 +6195,7 @@
       </p:sp>
       <p:sp>
         <p:nvSpPr>
-          <p:cNvPr id="24" name="Rectangle 67"/>
+          <p:cNvPr id="24" name="Rectangle 74"/>
           <p:cNvSpPr/>
           <p:nvPr/>
         </p:nvSpPr>
@@ -5821,7 +6244,7 @@
       </p:sp>
       <p:sp>
         <p:nvSpPr>
-          <p:cNvPr id="25" name="TextBox 68"/>
+          <p:cNvPr id="25" name="TextBox 75"/>
           <p:cNvSpPr txBox="1"/>
           <p:nvPr/>
         </p:nvSpPr>
@@ -5878,7 +6301,7 @@
       </p:sp>
       <p:sp>
         <p:nvSpPr>
-          <p:cNvPr id="26" name="TextBox 69"/>
+          <p:cNvPr id="26" name="TextBox 76"/>
           <p:cNvSpPr txBox="1"/>
           <p:nvPr/>
         </p:nvSpPr>
@@ -5935,7 +6358,7 @@
       </p:sp>
       <p:sp>
         <p:nvSpPr>
-          <p:cNvPr id="27" name="TextBox 70"/>
+          <p:cNvPr id="27" name="TextBox 77"/>
           <p:cNvSpPr txBox="1"/>
           <p:nvPr/>
         </p:nvSpPr>
@@ -5992,7 +6415,7 @@
       </p:sp>
       <p:sp>
         <p:nvSpPr>
-          <p:cNvPr id="28" name="TextBox 71"/>
+          <p:cNvPr id="28" name="TextBox 78"/>
           <p:cNvSpPr txBox="1"/>
           <p:nvPr/>
         </p:nvSpPr>
@@ -6085,7 +6508,7 @@
       </p:grpSpPr>
       <p:sp>
         <p:nvSpPr>
-          <p:cNvPr id="2" name="TextBox 73"/>
+          <p:cNvPr id="2" name="TextBox 80"/>
           <p:cNvSpPr txBox="1"/>
           <p:nvPr/>
         </p:nvSpPr>
@@ -6142,7 +6565,7 @@
       </p:sp>
       <p:sp>
         <p:nvSpPr>
-          <p:cNvPr id="3" name="TextBox 74"/>
+          <p:cNvPr id="3" name="TextBox 81"/>
           <p:cNvSpPr txBox="1"/>
           <p:nvPr/>
         </p:nvSpPr>
@@ -6230,7 +6653,7 @@
       </p:sp>
       <p:sp>
         <p:nvSpPr>
-          <p:cNvPr id="4" name="Rounded Rectangle 75"/>
+          <p:cNvPr id="4" name="Rounded Rectangle 82"/>
           <p:cNvSpPr/>
           <p:nvPr/>
         </p:nvSpPr>
@@ -6279,7 +6702,7 @@
       </p:sp>
       <p:sp>
         <p:nvSpPr>
-          <p:cNvPr id="5" name="TextBox 76"/>
+          <p:cNvPr id="5" name="TextBox 83"/>
           <p:cNvSpPr txBox="1"/>
           <p:nvPr/>
         </p:nvSpPr>
@@ -6336,7 +6759,7 @@
       </p:sp>
       <p:sp>
         <p:nvSpPr>
-          <p:cNvPr id="6" name="TextBox 77"/>
+          <p:cNvPr id="6" name="TextBox 84"/>
           <p:cNvSpPr txBox="1"/>
           <p:nvPr/>
         </p:nvSpPr>
@@ -6393,7 +6816,7 @@
       </p:sp>
       <p:sp>
         <p:nvSpPr>
-          <p:cNvPr id="7" name="Rounded Rectangle 78"/>
+          <p:cNvPr id="7" name="Rounded Rectangle 85"/>
           <p:cNvSpPr/>
           <p:nvPr/>
         </p:nvSpPr>
@@ -6442,7 +6865,7 @@
       </p:sp>
       <p:sp>
         <p:nvSpPr>
-          <p:cNvPr id="8" name="TextBox 79"/>
+          <p:cNvPr id="8" name="TextBox 86"/>
           <p:cNvSpPr txBox="1"/>
           <p:nvPr/>
         </p:nvSpPr>
@@ -6499,7 +6922,7 @@
       </p:sp>
       <p:sp>
         <p:nvSpPr>
-          <p:cNvPr id="9" name="TextBox 80"/>
+          <p:cNvPr id="9" name="TextBox 87"/>
           <p:cNvSpPr txBox="1"/>
           <p:nvPr/>
         </p:nvSpPr>
@@ -6556,7 +6979,7 @@
       </p:sp>
       <p:sp>
         <p:nvSpPr>
-          <p:cNvPr id="10" name="Rounded Rectangle 81"/>
+          <p:cNvPr id="10" name="Rounded Rectangle 88"/>
           <p:cNvSpPr/>
           <p:nvPr/>
         </p:nvSpPr>
@@ -6605,7 +7028,7 @@
       </p:sp>
       <p:sp>
         <p:nvSpPr>
-          <p:cNvPr id="11" name="TextBox 82"/>
+          <p:cNvPr id="11" name="TextBox 89"/>
           <p:cNvSpPr txBox="1"/>
           <p:nvPr/>
         </p:nvSpPr>
@@ -6662,7 +7085,7 @@
       </p:sp>
       <p:sp>
         <p:nvSpPr>
-          <p:cNvPr id="12" name="TextBox 83"/>
+          <p:cNvPr id="12" name="TextBox 90"/>
           <p:cNvSpPr txBox="1"/>
           <p:nvPr/>
         </p:nvSpPr>
@@ -6719,7 +7142,7 @@
       </p:sp>
       <p:sp>
         <p:nvSpPr>
-          <p:cNvPr id="13" name="Rounded Rectangle 84"/>
+          <p:cNvPr id="13" name="Rounded Rectangle 91"/>
           <p:cNvSpPr/>
           <p:nvPr/>
         </p:nvSpPr>
@@ -6768,7 +7191,7 @@
       </p:sp>
       <p:sp>
         <p:nvSpPr>
-          <p:cNvPr id="14" name="TextBox 85"/>
+          <p:cNvPr id="14" name="TextBox 92"/>
           <p:cNvSpPr txBox="1"/>
           <p:nvPr/>
         </p:nvSpPr>
@@ -6825,7 +7248,7 @@
       </p:sp>
       <p:sp>
         <p:nvSpPr>
-          <p:cNvPr id="15" name="TextBox 86"/>
+          <p:cNvPr id="15" name="TextBox 93"/>
           <p:cNvSpPr txBox="1"/>
           <p:nvPr/>
         </p:nvSpPr>
@@ -6882,7 +7305,7 @@
       </p:sp>
       <p:sp>
         <p:nvSpPr>
-          <p:cNvPr id="16" name="Rounded Rectangle 87"/>
+          <p:cNvPr id="16" name="Rounded Rectangle 94"/>
           <p:cNvSpPr/>
           <p:nvPr/>
         </p:nvSpPr>
@@ -6931,7 +7354,7 @@
       </p:sp>
       <p:sp>
         <p:nvSpPr>
-          <p:cNvPr id="17" name="TextBox 88"/>
+          <p:cNvPr id="17" name="TextBox 95"/>
           <p:cNvSpPr txBox="1"/>
           <p:nvPr/>
         </p:nvSpPr>
@@ -6988,7 +7411,7 @@
       </p:sp>
       <p:sp>
         <p:nvSpPr>
-          <p:cNvPr id="18" name="TextBox 89"/>
+          <p:cNvPr id="18" name="TextBox 96"/>
           <p:cNvSpPr txBox="1"/>
           <p:nvPr/>
         </p:nvSpPr>
@@ -7045,7 +7468,7 @@
       </p:sp>
       <p:sp>
         <p:nvSpPr>
-          <p:cNvPr id="19" name="Rounded Rectangle 90"/>
+          <p:cNvPr id="19" name="Rounded Rectangle 97"/>
           <p:cNvSpPr/>
           <p:nvPr/>
         </p:nvSpPr>
@@ -7094,7 +7517,7 @@
       </p:sp>
       <p:sp>
         <p:nvSpPr>
-          <p:cNvPr id="20" name="TextBox 91"/>
+          <p:cNvPr id="20" name="TextBox 98"/>
           <p:cNvSpPr txBox="1"/>
           <p:nvPr/>
         </p:nvSpPr>
@@ -7151,7 +7574,7 @@
       </p:sp>
       <p:sp>
         <p:nvSpPr>
-          <p:cNvPr id="21" name="TextBox 92"/>
+          <p:cNvPr id="21" name="TextBox 99"/>
           <p:cNvSpPr txBox="1"/>
           <p:nvPr/>
         </p:nvSpPr>
@@ -7208,7 +7631,7 @@
       </p:sp>
       <p:sp>
         <p:nvSpPr>
-          <p:cNvPr id="22" name="TextBox 93"/>
+          <p:cNvPr id="22" name="TextBox 100"/>
           <p:cNvSpPr txBox="1"/>
           <p:nvPr/>
         </p:nvSpPr>
@@ -7332,7 +7755,7 @@
       </p:grpSpPr>
       <p:sp>
         <p:nvSpPr>
-          <p:cNvPr id="2" name="TextBox 95"/>
+          <p:cNvPr id="2" name="TextBox 102"/>
           <p:cNvSpPr txBox="1"/>
           <p:nvPr/>
         </p:nvSpPr>
@@ -7389,7 +7812,7 @@
       </p:sp>
       <p:sp>
         <p:nvSpPr>
-          <p:cNvPr id="3" name="TextBox 96"/>
+          <p:cNvPr id="3" name="TextBox 103"/>
           <p:cNvSpPr txBox="1"/>
           <p:nvPr/>
         </p:nvSpPr>
@@ -7508,7 +7931,7 @@
       </p:sp>
       <p:sp>
         <p:nvSpPr>
-          <p:cNvPr id="4" name="TextBox 97"/>
+          <p:cNvPr id="4" name="TextBox 104"/>
           <p:cNvSpPr txBox="1"/>
           <p:nvPr/>
         </p:nvSpPr>
@@ -7596,7 +8019,7 @@
       </p:sp>
       <p:sp>
         <p:nvSpPr>
-          <p:cNvPr id="5" name="TextBox 98"/>
+          <p:cNvPr id="5" name="TextBox 105"/>
           <p:cNvSpPr txBox="1"/>
           <p:nvPr/>
         </p:nvSpPr>
@@ -7684,7 +8107,7 @@
       </p:sp>
       <p:sp>
         <p:nvSpPr>
-          <p:cNvPr id="6" name="TextBox 99"/>
+          <p:cNvPr id="6" name="TextBox 106"/>
           <p:cNvSpPr txBox="1"/>
           <p:nvPr/>
         </p:nvSpPr>

--- a/slides/landing-tall.pptx
+++ b/slides/landing-tall.pptx
@@ -8025,6 +8025,63 @@
         </p:nvSpPr>
         <p:spPr>
           <a:xfrm>
+            <a:off x="406400" y="6273800"/>
+            <a:ext cx="4902200" cy="2870200"/>
+          </a:xfrm>
+          <a:prstGeom prst="rect">
+            <a:avLst/>
+          </a:prstGeom>
+          <a:noFill/>
+          <a:ln>
+            <a:noFill/>
+          </a:ln>
+        </p:spPr>
+        <p:txBody>
+          <a:bodyPr wrap="square" lIns="0" tIns="0" rIns="0" bIns="0" anchor="t" rtlCol="0">
+            <a:spAutoFit/>
+          </a:bodyPr>
+          <a:lstStyle/>
+          <a:p>
+            <a:pPr algn="l" marL="0" indent="0">
+              <a:lnSpc>
+                <a:spcPct val="100000"/>
+              </a:lnSpc>
+              <a:spcBef>
+                <a:spcPts val="0"/>
+              </a:spcBef>
+              <a:spcAft>
+                <a:spcPts val="0"/>
+              </a:spcAft>
+              <a:buNone/>
+            </a:pPr>
+            <a:r>
+              <a:rPr lang="en-US" sz="1800" b="1" i="0" u="none" strike="noStrike" dirty="0">
+                <a:solidFill>
+                  <a:srgbClr val="FFFFFF"/>
+                </a:solidFill>
+                <a:latin typeface="Calibri"/>
+                <a:cs typeface="Calibri"/>
+              </a:rPr>
+              <a:t>github.com/starling-build/starling</a:t>
+            </a:r>
+            <a:endParaRPr lang="en-US" sz="1800" b="1" i="0" u="none" strike="noStrike" dirty="0">
+              <a:solidFill>
+                <a:srgbClr val="FFFFFF"/>
+              </a:solidFill>
+              <a:latin typeface="Calibri"/>
+              <a:cs typeface="Calibri"/>
+            </a:endParaRPr>
+          </a:p>
+        </p:txBody>
+      </p:sp>
+      <p:sp>
+        <p:nvSpPr>
+          <p:cNvPr id="6" name="TextBox 106"/>
+          <p:cNvSpPr txBox="1"/>
+          <p:nvPr/>
+        </p:nvSpPr>
+        <p:spPr>
+          <a:xfrm>
             <a:off x="406400" y="6832600"/>
             <a:ext cx="4902200" cy="2311400"/>
           </a:xfrm>
@@ -8107,7 +8164,7 @@
       </p:sp>
       <p:sp>
         <p:nvSpPr>
-          <p:cNvPr id="6" name="TextBox 106"/>
+          <p:cNvPr id="7" name="TextBox 107"/>
           <p:cNvSpPr txBox="1"/>
           <p:nvPr/>
         </p:nvSpPr>
